--- a/week1_proposal_v2.pptx
+++ b/week1_proposal_v2.pptx
@@ -15,6 +15,7 @@
     <p:sldId id="263" r:id="rId14"/>
     <p:sldId id="264" r:id="rId15"/>
     <p:sldId id="265" r:id="rId16"/>
+    <p:sldId id="266" r:id="rId17"/>
   </p:sldIdLst>
   <p:sldSz cx="12191695" cy="6858000" type="screen4x3"/>
   <p:notesSz cx="6858000" cy="9144000"/>
@@ -3319,7 +3320,519 @@
               </a:defRPr>
             </a:pPr>
             <a:r>
-              <a:t>9. Success Criteria</a:t>
+              <a:t>9. Verification Plan</a:t>
+            </a:r>
+          </a:p>
+        </p:txBody>
+      </p:sp>
+      <p:sp>
+        <p:nvSpPr>
+          <p:cNvPr id="3" name="TextBox 2"/>
+          <p:cNvSpPr txBox="1"/>
+          <p:nvPr/>
+        </p:nvSpPr>
+        <p:spPr>
+          <a:xfrm>
+            <a:off x="777240" y="777240"/>
+            <a:ext cx="10972800" cy="365760"/>
+          </a:xfrm>
+          <a:prstGeom prst="rect">
+            <a:avLst/>
+          </a:prstGeom>
+          <a:noFill/>
+        </p:spPr>
+        <p:txBody>
+          <a:bodyPr wrap="square">
+            <a:spAutoFit/>
+          </a:bodyPr>
+          <a:lstStyle/>
+          <a:p>
+            <a:pPr algn="l">
+              <a:defRPr sz="1800" b="0">
+                <a:solidFill>
+                  <a:srgbClr val="666677"/>
+                </a:solidFill>
+              </a:defRPr>
+            </a:pPr>
+            <a:r>
+              <a:t>검증 계획</a:t>
+            </a:r>
+          </a:p>
+        </p:txBody>
+      </p:sp>
+      <p:sp>
+        <p:nvSpPr>
+          <p:cNvPr id="4" name="Rectangle 3"/>
+          <p:cNvSpPr/>
+          <p:nvPr/>
+        </p:nvSpPr>
+        <p:spPr>
+          <a:xfrm>
+            <a:off x="548640" y="1463040"/>
+            <a:ext cx="5303520" cy="1554480"/>
+          </a:xfrm>
+          <a:prstGeom prst="rect">
+            <a:avLst/>
+          </a:prstGeom>
+          <a:solidFill>
+            <a:srgbClr val="F0F4FA"/>
+          </a:solidFill>
+          <a:ln w="12700">
+            <a:solidFill>
+              <a:srgbClr val="304060"/>
+            </a:solidFill>
+          </a:ln>
+        </p:spPr>
+        <p:style>
+          <a:lnRef idx="1">
+            <a:schemeClr val="accent1"/>
+          </a:lnRef>
+          <a:fillRef idx="3">
+            <a:schemeClr val="accent1"/>
+          </a:fillRef>
+          <a:effectRef idx="2">
+            <a:schemeClr val="accent1"/>
+          </a:effectRef>
+          <a:fontRef idx="minor">
+            <a:schemeClr val="lt1"/>
+          </a:fontRef>
+        </p:style>
+        <p:txBody>
+          <a:bodyPr rtlCol="0" anchor="ctr" wrap="square"/>
+          <a:lstStyle/>
+          <a:p>
+            <a:pPr algn="l">
+              <a:defRPr sz="1600" b="1">
+                <a:solidFill>
+                  <a:srgbClr val="C0392B"/>
+                </a:solidFill>
+              </a:defRPr>
+            </a:pPr>
+            <a:r>
+              <a:t>1. Analytical Comparison | 해석해 비교</a:t>
+            </a:r>
+          </a:p>
+          <a:p>
+            <a:pPr algn="l">
+              <a:spcBef>
+                <a:spcPts val="0"/>
+              </a:spcBef>
+              <a:spcAft>
+                <a:spcPts val="200"/>
+              </a:spcAft>
+              <a:defRPr sz="1200" b="0">
+                <a:solidFill>
+                  <a:srgbClr val="666677"/>
+                </a:solidFill>
+              </a:defRPr>
+            </a:pPr>
+            <a:r>
+              <a:t>[Sanity Check]</a:t>
+            </a:r>
+          </a:p>
+          <a:p>
+            <a:pPr algn="l">
+              <a:spcBef>
+                <a:spcPts val="400"/>
+              </a:spcBef>
+              <a:spcAft>
+                <a:spcPts val="200"/>
+              </a:spcAft>
+              <a:defRPr sz="1300" b="0">
+                <a:solidFill>
+                  <a:srgbClr val="222222"/>
+                </a:solidFill>
+              </a:defRPr>
+            </a:pPr>
+            <a:r>
+              <a:t>  • Single atom: CDA result vs p = α · E_inc</a:t>
+            </a:r>
+            <a:br/>
+            <a:r>
+              <a:t>1개 원자: CDA 결과 vs 직접 계산</a:t>
+            </a:r>
+          </a:p>
+          <a:p>
+            <a:pPr algn="l">
+              <a:spcBef>
+                <a:spcPts val="400"/>
+              </a:spcBef>
+              <a:spcAft>
+                <a:spcPts val="200"/>
+              </a:spcAft>
+              <a:defRPr sz="1300" b="0">
+                <a:solidFill>
+                  <a:srgbClr val="222222"/>
+                </a:solidFill>
+              </a:defRPr>
+            </a:pPr>
+            <a:r>
+              <a:t>  • Two atoms: compare with analytical 2-dipole solution</a:t>
+            </a:r>
+            <a:br/>
+            <a:r>
+              <a:t>2개 원자: 해석적 해와 비교</a:t>
+            </a:r>
+          </a:p>
+        </p:txBody>
+      </p:sp>
+      <p:sp>
+        <p:nvSpPr>
+          <p:cNvPr id="5" name="Rectangle 4"/>
+          <p:cNvSpPr/>
+          <p:nvPr/>
+        </p:nvSpPr>
+        <p:spPr>
+          <a:xfrm>
+            <a:off x="548640" y="3291840"/>
+            <a:ext cx="5303520" cy="1554480"/>
+          </a:xfrm>
+          <a:prstGeom prst="rect">
+            <a:avLst/>
+          </a:prstGeom>
+          <a:solidFill>
+            <a:srgbClr val="F0F4FA"/>
+          </a:solidFill>
+          <a:ln w="12700">
+            <a:solidFill>
+              <a:srgbClr val="304060"/>
+            </a:solidFill>
+          </a:ln>
+        </p:spPr>
+        <p:style>
+          <a:lnRef idx="1">
+            <a:schemeClr val="accent1"/>
+          </a:lnRef>
+          <a:fillRef idx="3">
+            <a:schemeClr val="accent1"/>
+          </a:fillRef>
+          <a:effectRef idx="2">
+            <a:schemeClr val="accent1"/>
+          </a:effectRef>
+          <a:fontRef idx="minor">
+            <a:schemeClr val="lt1"/>
+          </a:fontRef>
+        </p:style>
+        <p:txBody>
+          <a:bodyPr rtlCol="0" anchor="ctr" wrap="square"/>
+          <a:lstStyle/>
+          <a:p>
+            <a:pPr algn="l">
+              <a:defRPr sz="1600" b="1">
+                <a:solidFill>
+                  <a:srgbClr val="C0392B"/>
+                </a:solidFill>
+              </a:defRPr>
+            </a:pPr>
+            <a:r>
+              <a:t>2. Limiting Case | 극한 검증</a:t>
+            </a:r>
+          </a:p>
+          <a:p>
+            <a:pPr algn="l">
+              <a:spcBef>
+                <a:spcPts val="0"/>
+              </a:spcBef>
+              <a:spcAft>
+                <a:spcPts val="200"/>
+              </a:spcAft>
+              <a:defRPr sz="1200" b="0">
+                <a:solidFill>
+                  <a:srgbClr val="666677"/>
+                </a:solidFill>
+              </a:defRPr>
+            </a:pPr>
+            <a:r>
+              <a:t>[Consistency Check]</a:t>
+            </a:r>
+          </a:p>
+          <a:p>
+            <a:pPr algn="l">
+              <a:spcBef>
+                <a:spcPts val="400"/>
+              </a:spcBef>
+              <a:spcAft>
+                <a:spcPts val="200"/>
+              </a:spcAft>
+              <a:defRPr sz="1300" b="0">
+                <a:solidFill>
+                  <a:srgbClr val="222222"/>
+                </a:solidFill>
+              </a:defRPr>
+            </a:pPr>
+            <a:r>
+              <a:t>  • P → ∞ : coupled phase → isolated phase</a:t>
+            </a:r>
+            <a:br/>
+            <a:r>
+              <a:t>P → ∞ : 커플링 위상 → 고립 위상 수렴</a:t>
+            </a:r>
+          </a:p>
+          <a:p>
+            <a:pPr algn="l">
+              <a:spcBef>
+                <a:spcPts val="400"/>
+              </a:spcBef>
+              <a:spcAft>
+                <a:spcPts val="200"/>
+              </a:spcAft>
+              <a:defRPr sz="1300" b="0">
+                <a:solidFill>
+                  <a:srgbClr val="222222"/>
+                </a:solidFill>
+              </a:defRPr>
+            </a:pPr>
+            <a:r>
+              <a:t>  • Δφ → 0  as  P → ∞</a:t>
+            </a:r>
+          </a:p>
+        </p:txBody>
+      </p:sp>
+      <p:sp>
+        <p:nvSpPr>
+          <p:cNvPr id="6" name="Rectangle 5"/>
+          <p:cNvSpPr/>
+          <p:nvPr/>
+        </p:nvSpPr>
+        <p:spPr>
+          <a:xfrm>
+            <a:off x="6217920" y="1463040"/>
+            <a:ext cx="5303520" cy="1554480"/>
+          </a:xfrm>
+          <a:prstGeom prst="rect">
+            <a:avLst/>
+          </a:prstGeom>
+          <a:solidFill>
+            <a:srgbClr val="F0F4FA"/>
+          </a:solidFill>
+          <a:ln w="12700">
+            <a:solidFill>
+              <a:srgbClr val="304060"/>
+            </a:solidFill>
+          </a:ln>
+        </p:spPr>
+        <p:style>
+          <a:lnRef idx="1">
+            <a:schemeClr val="accent1"/>
+          </a:lnRef>
+          <a:fillRef idx="3">
+            <a:schemeClr val="accent1"/>
+          </a:fillRef>
+          <a:effectRef idx="2">
+            <a:schemeClr val="accent1"/>
+          </a:effectRef>
+          <a:fontRef idx="minor">
+            <a:schemeClr val="lt1"/>
+          </a:fontRef>
+        </p:style>
+        <p:txBody>
+          <a:bodyPr rtlCol="0" anchor="ctr" wrap="square"/>
+          <a:lstStyle/>
+          <a:p>
+            <a:pPr algn="l">
+              <a:defRPr sz="1600" b="1">
+                <a:solidFill>
+                  <a:srgbClr val="C0392B"/>
+                </a:solidFill>
+              </a:defRPr>
+            </a:pPr>
+            <a:r>
+              <a:t>3. Optical Theorem | 에너지 보존</a:t>
+            </a:r>
+          </a:p>
+          <a:p>
+            <a:pPr algn="l">
+              <a:spcBef>
+                <a:spcPts val="0"/>
+              </a:spcBef>
+              <a:spcAft>
+                <a:spcPts val="200"/>
+              </a:spcAft>
+              <a:defRPr sz="1200" b="0">
+                <a:solidFill>
+                  <a:srgbClr val="666677"/>
+                </a:solidFill>
+              </a:defRPr>
+            </a:pPr>
+            <a:r>
+              <a:t>[Conservation Check]</a:t>
+            </a:r>
+          </a:p>
+          <a:p>
+            <a:pPr algn="l">
+              <a:spcBef>
+                <a:spcPts val="400"/>
+              </a:spcBef>
+              <a:spcAft>
+                <a:spcPts val="200"/>
+              </a:spcAft>
+              <a:defRPr sz="1300" b="0">
+                <a:solidFill>
+                  <a:srgbClr val="222222"/>
+                </a:solidFill>
+              </a:defRPr>
+            </a:pPr>
+            <a:r>
+              <a:t>  • Verify extinction cross-section satisfies optical theorem</a:t>
+            </a:r>
+            <a:br/>
+            <a:r>
+              <a:t>소광 단면적이 optical theorem 만족하는지 검증</a:t>
+            </a:r>
+          </a:p>
+        </p:txBody>
+      </p:sp>
+      <p:sp>
+        <p:nvSpPr>
+          <p:cNvPr id="7" name="Rectangle 6"/>
+          <p:cNvSpPr/>
+          <p:nvPr/>
+        </p:nvSpPr>
+        <p:spPr>
+          <a:xfrm>
+            <a:off x="6217920" y="3291840"/>
+            <a:ext cx="5303520" cy="1554480"/>
+          </a:xfrm>
+          <a:prstGeom prst="rect">
+            <a:avLst/>
+          </a:prstGeom>
+          <a:solidFill>
+            <a:srgbClr val="F0F4FA"/>
+          </a:solidFill>
+          <a:ln w="12700">
+            <a:solidFill>
+              <a:srgbClr val="304060"/>
+            </a:solidFill>
+          </a:ln>
+        </p:spPr>
+        <p:style>
+          <a:lnRef idx="1">
+            <a:schemeClr val="accent1"/>
+          </a:lnRef>
+          <a:fillRef idx="3">
+            <a:schemeClr val="accent1"/>
+          </a:fillRef>
+          <a:effectRef idx="2">
+            <a:schemeClr val="accent1"/>
+          </a:effectRef>
+          <a:fontRef idx="minor">
+            <a:schemeClr val="lt1"/>
+          </a:fontRef>
+        </p:style>
+        <p:txBody>
+          <a:bodyPr rtlCol="0" anchor="ctr" wrap="square"/>
+          <a:lstStyle/>
+          <a:p>
+            <a:pPr algn="l">
+              <a:defRPr sz="1600" b="1">
+                <a:solidFill>
+                  <a:srgbClr val="C0392B"/>
+                </a:solidFill>
+              </a:defRPr>
+            </a:pPr>
+            <a:r>
+              <a:t>4. Convergence | 수렴성 검사</a:t>
+            </a:r>
+          </a:p>
+          <a:p>
+            <a:pPr algn="l">
+              <a:spcBef>
+                <a:spcPts val="0"/>
+              </a:spcBef>
+              <a:spcAft>
+                <a:spcPts val="200"/>
+              </a:spcAft>
+              <a:defRPr sz="1200" b="0">
+                <a:solidFill>
+                  <a:srgbClr val="666677"/>
+                </a:solidFill>
+              </a:defRPr>
+            </a:pPr>
+            <a:r>
+              <a:t>[Robustness Check]</a:t>
+            </a:r>
+          </a:p>
+          <a:p>
+            <a:pPr algn="l">
+              <a:spcBef>
+                <a:spcPts val="400"/>
+              </a:spcBef>
+              <a:spcAft>
+                <a:spcPts val="200"/>
+              </a:spcAft>
+              <a:defRPr sz="1300" b="0">
+                <a:solidFill>
+                  <a:srgbClr val="222222"/>
+                </a:solidFill>
+              </a:defRPr>
+            </a:pPr>
+            <a:r>
+              <a:t>  • Central atom's Δφ converges as N increases</a:t>
+            </a:r>
+            <a:br/>
+            <a:r>
+              <a:t>배열 크기 N ↑ 시 중심 원자 Δφ 수렴 확인</a:t>
+            </a:r>
+          </a:p>
+        </p:txBody>
+      </p:sp>
+    </p:spTree>
+  </p:cSld>
+  <p:clrMapOvr>
+    <a:masterClrMapping/>
+  </p:clrMapOvr>
+</p:sld>
+</file>
+
+<file path=ppt/slides/slide11.xml><?xml version="1.0" encoding="utf-8"?>
+<p:sld xmlns:a="http://schemas.openxmlformats.org/drawingml/2006/main" xmlns:p="http://schemas.openxmlformats.org/presentationml/2006/main" xmlns:r="http://schemas.openxmlformats.org/officeDocument/2006/relationships">
+  <p:cSld>
+    <p:bg>
+      <p:bgPr>
+        <a:solidFill>
+          <a:srgbClr val="FFFFFF"/>
+        </a:solidFill>
+        <a:effectLst/>
+      </p:bgPr>
+    </p:bg>
+    <p:spTree>
+      <p:nvGrpSpPr>
+        <p:cNvPr id="1" name=""/>
+        <p:cNvGrpSpPr/>
+        <p:nvPr/>
+      </p:nvGrpSpPr>
+      <p:grpSpPr/>
+      <p:sp>
+        <p:nvSpPr>
+          <p:cNvPr id="2" name="TextBox 1"/>
+          <p:cNvSpPr txBox="1"/>
+          <p:nvPr/>
+        </p:nvSpPr>
+        <p:spPr>
+          <a:xfrm>
+            <a:off x="548640" y="274320"/>
+            <a:ext cx="10972800" cy="457200"/>
+          </a:xfrm>
+          <a:prstGeom prst="rect">
+            <a:avLst/>
+          </a:prstGeom>
+          <a:noFill/>
+        </p:spPr>
+        <p:txBody>
+          <a:bodyPr wrap="square">
+            <a:spAutoFit/>
+          </a:bodyPr>
+          <a:lstStyle/>
+          <a:p>
+            <a:pPr algn="l">
+              <a:defRPr sz="2800" b="1">
+                <a:solidFill>
+                  <a:srgbClr val="1A478A"/>
+                </a:solidFill>
+              </a:defRPr>
+            </a:pPr>
+            <a:r>
+              <a:t>10. Success Criteria</a:t>
             </a:r>
           </a:p>
         </p:txBody>
@@ -5263,7 +5776,7 @@
               </a:defRPr>
             </a:pPr>
             <a:r>
-              <a:t>4. Model</a:t>
+              <a:t>4. What is CDA?</a:t>
             </a:r>
           </a:p>
         </p:txBody>
@@ -5298,381 +5811,238 @@
               </a:defRPr>
             </a:pPr>
             <a:r>
-              <a:t>물리 모델</a:t>
-            </a:r>
-          </a:p>
-        </p:txBody>
-      </p:sp>
-      <p:sp>
-        <p:nvSpPr>
-          <p:cNvPr id="4" name="TextBox 3"/>
-          <p:cNvSpPr txBox="1"/>
+              <a:t>CDA란?</a:t>
+            </a:r>
+          </a:p>
+        </p:txBody>
+      </p:sp>
+      <p:sp>
+        <p:nvSpPr>
+          <p:cNvPr id="4" name="Rectangle 3"/>
+          <p:cNvSpPr/>
           <p:nvPr/>
         </p:nvSpPr>
         <p:spPr>
           <a:xfrm>
-            <a:off x="731520" y="1371600"/>
-            <a:ext cx="5029200" cy="365760"/>
+            <a:off x="914400" y="1463040"/>
+            <a:ext cx="10332720" cy="4572000"/>
           </a:xfrm>
           <a:prstGeom prst="rect">
             <a:avLst/>
           </a:prstGeom>
-          <a:noFill/>
-        </p:spPr>
-        <p:txBody>
-          <a:bodyPr wrap="square">
-            <a:spAutoFit/>
-          </a:bodyPr>
-          <a:lstStyle/>
-          <a:p>
-            <a:pPr algn="l">
+          <a:solidFill>
+            <a:srgbClr val="F0F4FA"/>
+          </a:solidFill>
+          <a:ln w="19050">
+            <a:solidFill>
+              <a:srgbClr val="1A478A"/>
+            </a:solidFill>
+          </a:ln>
+        </p:spPr>
+        <p:style>
+          <a:lnRef idx="1">
+            <a:schemeClr val="accent1"/>
+          </a:lnRef>
+          <a:fillRef idx="3">
+            <a:schemeClr val="accent1"/>
+          </a:fillRef>
+          <a:effectRef idx="2">
+            <a:schemeClr val="accent1"/>
+          </a:effectRef>
+          <a:fontRef idx="minor">
+            <a:schemeClr val="lt1"/>
+          </a:fontRef>
+        </p:style>
+        <p:txBody>
+          <a:bodyPr rtlCol="0" anchor="ctr" wrap="square"/>
+          <a:lstStyle/>
+          <a:p>
+            <a:pPr algn="ctr">
+              <a:defRPr sz="2600" b="1">
+                <a:solidFill>
+                  <a:srgbClr val="1A478A"/>
+                </a:solidFill>
+              </a:defRPr>
+            </a:pPr>
+            <a:r>
+              <a:t>Coupled Dipole Approximation (CDA)</a:t>
+            </a:r>
+          </a:p>
+          <a:p>
+            <a:pPr algn="l">
+              <a:spcBef>
+                <a:spcPts val="400"/>
+              </a:spcBef>
+              <a:spcAft>
+                <a:spcPts val="200"/>
+              </a:spcAft>
+              <a:defRPr sz="800" b="0">
+                <a:solidFill>
+                  <a:srgbClr val="222222"/>
+                </a:solidFill>
+              </a:defRPr>
+            </a:pPr>
+          </a:p>
+          <a:p>
+            <a:pPr algn="l">
+              <a:spcBef>
+                <a:spcPts val="1000"/>
+              </a:spcBef>
+              <a:spcAft>
+                <a:spcPts val="200"/>
+              </a:spcAft>
               <a:defRPr sz="1800" b="1">
                 <a:solidFill>
-                  <a:srgbClr val="2E6BB0"/>
-                </a:solidFill>
-              </a:defRPr>
-            </a:pPr>
-            <a:r>
-              <a:t>Point dipole model | 점 쌍극자 모델:</a:t>
-            </a:r>
-          </a:p>
-        </p:txBody>
-      </p:sp>
-      <p:pic>
-        <p:nvPicPr>
-          <p:cNvPr id="5" name="Picture 4" descr="eq_c022b2b3.png"/>
-          <p:cNvPicPr>
-            <a:picLocks noChangeAspect="1"/>
-          </p:cNvPicPr>
-          <p:nvPr/>
-        </p:nvPicPr>
-        <p:blipFill>
-          <a:blip r:embed="rId2"/>
-          <a:stretch>
-            <a:fillRect/>
-          </a:stretch>
-        </p:blipFill>
-        <p:spPr>
-          <a:xfrm>
-            <a:off x="1188720" y="1783080"/>
-            <a:ext cx="2102569" cy="502920"/>
-          </a:xfrm>
-          <a:prstGeom prst="rect">
-            <a:avLst/>
-          </a:prstGeom>
-        </p:spPr>
-      </p:pic>
-      <p:sp>
-        <p:nvSpPr>
-          <p:cNvPr id="6" name="TextBox 5"/>
-          <p:cNvSpPr txBox="1"/>
-          <p:nvPr/>
-        </p:nvSpPr>
-        <p:spPr>
-          <a:xfrm>
-            <a:off x="731520" y="2423160"/>
-            <a:ext cx="5029200" cy="365760"/>
-          </a:xfrm>
-          <a:prstGeom prst="rect">
-            <a:avLst/>
-          </a:prstGeom>
-          <a:noFill/>
-        </p:spPr>
-        <p:txBody>
-          <a:bodyPr wrap="square">
-            <a:spAutoFit/>
-          </a:bodyPr>
-          <a:lstStyle/>
-          <a:p>
-            <a:pPr algn="l">
+                  <a:srgbClr val="222222"/>
+                </a:solidFill>
+              </a:defRPr>
+            </a:pPr>
+            <a:r>
+              <a:t>▸  Proposed by Purcell &amp; Pennypacker (1973)</a:t>
+            </a:r>
+          </a:p>
+          <a:p>
+            <a:pPr algn="l">
+              <a:spcBef>
+                <a:spcPts val="0"/>
+              </a:spcBef>
+              <a:spcAft>
+                <a:spcPts val="200"/>
+              </a:spcAft>
+              <a:defRPr sz="1600" b="0">
+                <a:solidFill>
+                  <a:srgbClr val="666677"/>
+                </a:solidFill>
+              </a:defRPr>
+            </a:pPr>
+            <a:r>
+              <a:t>    1973년 Purcell &amp; Pennypacker가 성간 먼지 산란 계산을 위해 제안</a:t>
+            </a:r>
+          </a:p>
+          <a:p>
+            <a:pPr algn="l">
+              <a:spcBef>
+                <a:spcPts val="1000"/>
+              </a:spcBef>
+              <a:spcAft>
+                <a:spcPts val="200"/>
+              </a:spcAft>
               <a:defRPr sz="1800" b="1">
                 <a:solidFill>
-                  <a:srgbClr val="2E6BB0"/>
-                </a:solidFill>
-              </a:defRPr>
-            </a:pPr>
-            <a:r>
-              <a:t>Local electric field | 국소 전기장:</a:t>
-            </a:r>
-          </a:p>
-        </p:txBody>
-      </p:sp>
-      <p:pic>
-        <p:nvPicPr>
-          <p:cNvPr id="7" name="Picture 6" descr="eq_5c9656a5.png"/>
-          <p:cNvPicPr>
-            <a:picLocks noChangeAspect="1"/>
-          </p:cNvPicPr>
-          <p:nvPr/>
-        </p:nvPicPr>
-        <p:blipFill>
-          <a:blip r:embed="rId3"/>
-          <a:stretch>
-            <a:fillRect/>
-          </a:stretch>
-        </p:blipFill>
-        <p:spPr>
-          <a:xfrm>
-            <a:off x="1188720" y="2834640"/>
-            <a:ext cx="2296089" cy="502920"/>
-          </a:xfrm>
-          <a:prstGeom prst="rect">
-            <a:avLst/>
-          </a:prstGeom>
-        </p:spPr>
-      </p:pic>
-      <p:sp>
-        <p:nvSpPr>
-          <p:cNvPr id="8" name="TextBox 7"/>
-          <p:cNvSpPr txBox="1"/>
-          <p:nvPr/>
-        </p:nvSpPr>
-        <p:spPr>
-          <a:xfrm>
-            <a:off x="731520" y="3474720"/>
-            <a:ext cx="5029200" cy="365760"/>
-          </a:xfrm>
-          <a:prstGeom prst="rect">
-            <a:avLst/>
-          </a:prstGeom>
-          <a:noFill/>
-        </p:spPr>
-        <p:txBody>
-          <a:bodyPr wrap="square">
-            <a:spAutoFit/>
-          </a:bodyPr>
-          <a:lstStyle/>
-          <a:p>
-            <a:pPr algn="l">
+                  <a:srgbClr val="222222"/>
+                </a:solidFill>
+              </a:defRPr>
+            </a:pPr>
+            <a:r>
+              <a:t>▸  Each scatterer → single point dipole with polarizability α</a:t>
+            </a:r>
+          </a:p>
+          <a:p>
+            <a:pPr algn="l">
+              <a:spcBef>
+                <a:spcPts val="0"/>
+              </a:spcBef>
+              <a:spcAft>
+                <a:spcPts val="200"/>
+              </a:spcAft>
+              <a:defRPr sz="1600" b="0">
+                <a:solidFill>
+                  <a:srgbClr val="666677"/>
+                </a:solidFill>
+              </a:defRPr>
+            </a:pPr>
+            <a:r>
+              <a:t>    각 산란체를 분극률 α를 가진 점 쌍극자 하나로 근사</a:t>
+            </a:r>
+          </a:p>
+          <a:p>
+            <a:pPr algn="l">
+              <a:spcBef>
+                <a:spcPts val="1000"/>
+              </a:spcBef>
+              <a:spcAft>
+                <a:spcPts val="200"/>
+              </a:spcAft>
               <a:defRPr sz="1800" b="1">
                 <a:solidFill>
-                  <a:srgbClr val="2E6BB0"/>
-                </a:solidFill>
-              </a:defRPr>
-            </a:pPr>
-            <a:r>
-              <a:t>Green's function (2D) | Green 함수:</a:t>
-            </a:r>
-          </a:p>
-        </p:txBody>
-      </p:sp>
-      <p:pic>
-        <p:nvPicPr>
-          <p:cNvPr id="9" name="Picture 8" descr="eq_0850ae27.png"/>
-          <p:cNvPicPr>
-            <a:picLocks noChangeAspect="1"/>
-          </p:cNvPicPr>
-          <p:nvPr/>
-        </p:nvPicPr>
-        <p:blipFill>
-          <a:blip r:embed="rId4"/>
-          <a:stretch>
-            <a:fillRect/>
-          </a:stretch>
-        </p:blipFill>
-        <p:spPr>
-          <a:xfrm>
-            <a:off x="1188720" y="3886200"/>
-            <a:ext cx="2334656" cy="502920"/>
-          </a:xfrm>
-          <a:prstGeom prst="rect">
-            <a:avLst/>
-          </a:prstGeom>
-        </p:spPr>
-      </p:pic>
-      <p:sp>
-        <p:nvSpPr>
-          <p:cNvPr id="10" name="TextBox 9"/>
-          <p:cNvSpPr txBox="1"/>
-          <p:nvPr/>
-        </p:nvSpPr>
-        <p:spPr>
-          <a:xfrm>
-            <a:off x="731520" y="4526280"/>
-            <a:ext cx="5029200" cy="365760"/>
-          </a:xfrm>
-          <a:prstGeom prst="rect">
-            <a:avLst/>
-          </a:prstGeom>
-          <a:noFill/>
-        </p:spPr>
-        <p:txBody>
-          <a:bodyPr wrap="square">
-            <a:spAutoFit/>
-          </a:bodyPr>
-          <a:lstStyle/>
-          <a:p>
-            <a:pPr algn="l">
+                  <a:srgbClr val="222222"/>
+                </a:solidFill>
+              </a:defRPr>
+            </a:pPr>
+            <a:r>
+              <a:t>▸  Dipoles interact via free-space Green's function → self-consistent solution</a:t>
+            </a:r>
+          </a:p>
+          <a:p>
+            <a:pPr algn="l">
+              <a:spcBef>
+                <a:spcPts val="0"/>
+              </a:spcBef>
+              <a:spcAft>
+                <a:spcPts val="200"/>
+              </a:spcAft>
+              <a:defRPr sz="1600" b="0">
+                <a:solidFill>
+                  <a:srgbClr val="666677"/>
+                </a:solidFill>
+              </a:defRPr>
+            </a:pPr>
+            <a:r>
+              <a:t>    쌍극자 간 자유 공간 Green 함수로 상호작용 → 자기 일관적 풀이</a:t>
+            </a:r>
+          </a:p>
+          <a:p>
+            <a:pPr algn="l">
+              <a:spcBef>
+                <a:spcPts val="1000"/>
+              </a:spcBef>
+              <a:spcAft>
+                <a:spcPts val="200"/>
+              </a:spcAft>
               <a:defRPr sz="1800" b="1">
                 <a:solidFill>
-                  <a:srgbClr val="2E6BB0"/>
-                </a:solidFill>
-              </a:defRPr>
-            </a:pPr>
-            <a:r>
-              <a:t>Matrix form | 행렬 형태:</a:t>
-            </a:r>
-          </a:p>
-        </p:txBody>
-      </p:sp>
-      <p:pic>
-        <p:nvPicPr>
-          <p:cNvPr id="11" name="Picture 10" descr="eq_4205cc82.png"/>
-          <p:cNvPicPr>
-            <a:picLocks noChangeAspect="1"/>
-          </p:cNvPicPr>
-          <p:nvPr/>
-        </p:nvPicPr>
-        <p:blipFill>
-          <a:blip r:embed="rId5"/>
-          <a:stretch>
-            <a:fillRect/>
-          </a:stretch>
-        </p:blipFill>
-        <p:spPr>
-          <a:xfrm>
-            <a:off x="1188720" y="4937760"/>
-            <a:ext cx="1868805" cy="502920"/>
-          </a:xfrm>
-          <a:prstGeom prst="rect">
-            <a:avLst/>
-          </a:prstGeom>
-        </p:spPr>
-      </p:pic>
-      <p:sp>
-        <p:nvSpPr>
-          <p:cNvPr id="12" name="TextBox 11"/>
-          <p:cNvSpPr txBox="1"/>
-          <p:nvPr/>
-        </p:nvSpPr>
-        <p:spPr>
-          <a:xfrm>
-            <a:off x="6400800" y="1371600"/>
-            <a:ext cx="5029200" cy="4114800"/>
-          </a:xfrm>
-          <a:prstGeom prst="rect">
-            <a:avLst/>
-          </a:prstGeom>
-          <a:noFill/>
-        </p:spPr>
-        <p:txBody>
-          <a:bodyPr wrap="square">
-            <a:spAutoFit/>
-          </a:bodyPr>
-          <a:lstStyle/>
-          <a:p>
-            <a:pPr algn="l">
+                  <a:srgbClr val="222222"/>
+                </a:solidFill>
+              </a:defRPr>
+            </a:pPr>
+            <a:r>
+              <a:t>▸  Also known as DDA (Discrete Dipole Approximation)</a:t>
+            </a:r>
+          </a:p>
+          <a:p>
+            <a:pPr algn="l">
+              <a:spcBef>
+                <a:spcPts val="0"/>
+              </a:spcBef>
+              <a:spcAft>
+                <a:spcPts val="200"/>
+              </a:spcAft>
+              <a:defRPr sz="1600" b="0">
+                <a:solidFill>
+                  <a:srgbClr val="666677"/>
+                </a:solidFill>
+              </a:defRPr>
+            </a:pPr>
+            <a:r>
+              <a:t>    넓은 맥락에서 DDA (Discrete Dipole Approximation)로도 불림</a:t>
+            </a:r>
+          </a:p>
+          <a:p>
+            <a:pPr algn="l">
+              <a:spcBef>
+                <a:spcPts val="1000"/>
+              </a:spcBef>
+              <a:spcAft>
+                <a:spcPts val="200"/>
+              </a:spcAft>
               <a:defRPr sz="1800" b="1">
                 <a:solidFill>
-                  <a:srgbClr val="2E6BB0"/>
-                </a:solidFill>
-              </a:defRPr>
-            </a:pPr>
-            <a:r>
-              <a:t>Matrix element:</a:t>
-            </a:r>
-          </a:p>
-        </p:txBody>
-      </p:sp>
-      <p:sp>
-        <p:nvSpPr>
-          <p:cNvPr id="13" name="TextBox 12"/>
-          <p:cNvSpPr txBox="1"/>
-          <p:nvPr/>
-        </p:nvSpPr>
-        <p:spPr>
-          <a:xfrm>
-            <a:off x="6675120" y="1920240"/>
-            <a:ext cx="4572000" cy="320040"/>
-          </a:xfrm>
-          <a:prstGeom prst="rect">
-            <a:avLst/>
-          </a:prstGeom>
-          <a:noFill/>
-        </p:spPr>
-        <p:txBody>
-          <a:bodyPr wrap="square">
-            <a:spAutoFit/>
-          </a:bodyPr>
-          <a:lstStyle/>
-          <a:p>
-            <a:pPr algn="l">
-              <a:defRPr sz="1800" b="0">
-                <a:solidFill>
                   <a:srgbClr val="222222"/>
                 </a:solidFill>
               </a:defRPr>
             </a:pPr>
             <a:r>
-              <a:t>A_ii = 1/αᵢ  ,   A_ij = −G(rᵢⱼ)  (i≠j)</a:t>
-            </a:r>
-          </a:p>
-        </p:txBody>
-      </p:sp>
-      <p:sp>
-        <p:nvSpPr>
-          <p:cNvPr id="14" name="TextBox 13"/>
-          <p:cNvSpPr txBox="1"/>
-          <p:nvPr/>
-        </p:nvSpPr>
-        <p:spPr>
-          <a:xfrm>
-            <a:off x="6400800" y="3017520"/>
-            <a:ext cx="5029200" cy="3200400"/>
-          </a:xfrm>
-          <a:prstGeom prst="rect">
-            <a:avLst/>
-          </a:prstGeom>
-          <a:noFill/>
-        </p:spPr>
-        <p:txBody>
-          <a:bodyPr wrap="square">
-            <a:spAutoFit/>
-          </a:bodyPr>
-          <a:lstStyle/>
-          <a:p>
-            <a:pPr algn="l">
-              <a:defRPr sz="1800" b="1">
-                <a:solidFill>
-                  <a:srgbClr val="2E6BB0"/>
-                </a:solidFill>
-              </a:defRPr>
-            </a:pPr>
-            <a:r>
-              <a:t>Key components | 주요 구성</a:t>
-            </a:r>
-          </a:p>
-          <a:p>
-            <a:pPr algn="l">
-              <a:spcBef>
-                <a:spcPts val="400"/>
-              </a:spcBef>
-              <a:spcAft>
-                <a:spcPts val="200"/>
-              </a:spcAft>
-              <a:defRPr sz="600" b="0">
-                <a:solidFill>
-                  <a:srgbClr val="222222"/>
-                </a:solidFill>
-              </a:defRPr>
-            </a:pPr>
-          </a:p>
-          <a:p>
-            <a:pPr algn="l">
-              <a:spcBef>
-                <a:spcPts val="400"/>
-              </a:spcBef>
-              <a:spcAft>
-                <a:spcPts val="200"/>
-              </a:spcAft>
-              <a:defRPr sz="1600" b="1">
-                <a:solidFill>
-                  <a:srgbClr val="C0392B"/>
-                </a:solidFill>
-              </a:defRPr>
-            </a:pPr>
-            <a:r>
-              <a:t>▸ State var | 상태 변수</a:t>
+              <a:t>▸  Standard tool in nanophotonics, plasmonics, and metasurface analysis</a:t>
             </a:r>
           </a:p>
           <a:p>
@@ -5683,98 +6053,14 @@
               <a:spcAft>
                 <a:spcPts val="200"/>
               </a:spcAft>
-              <a:defRPr sz="1400" b="0">
-                <a:solidFill>
-                  <a:srgbClr val="222222"/>
-                </a:solidFill>
-              </a:defRPr>
-            </a:pPr>
-            <a:r>
-              <a:t>  Dipole moment pᵢ (complex)</a:t>
-            </a:r>
-            <a:br/>
-            <a:r>
-              <a:t>쌍극자 모멘트 pᵢ (복소수)</a:t>
-            </a:r>
-          </a:p>
-          <a:p>
-            <a:pPr algn="l">
-              <a:spcBef>
-                <a:spcPts val="400"/>
-              </a:spcBef>
-              <a:spcAft>
-                <a:spcPts val="200"/>
-              </a:spcAft>
-              <a:defRPr sz="1600" b="1">
-                <a:solidFill>
-                  <a:srgbClr val="C0392B"/>
-                </a:solidFill>
-              </a:defRPr>
-            </a:pPr>
-            <a:r>
-              <a:t>▸ Parameters | 파라미터</a:t>
-            </a:r>
-          </a:p>
-          <a:p>
-            <a:pPr algn="l">
-              <a:spcBef>
-                <a:spcPts val="0"/>
-              </a:spcBef>
-              <a:spcAft>
-                <a:spcPts val="200"/>
-              </a:spcAft>
-              <a:defRPr sz="1400" b="0">
-                <a:solidFill>
-                  <a:srgbClr val="222222"/>
-                </a:solidFill>
-              </a:defRPr>
-            </a:pPr>
-            <a:r>
-              <a:t>  Period P, α (Lorentzian), λ</a:t>
-            </a:r>
-            <a:br/>
-            <a:r>
-              <a:t>주기 P, 분극률 α, 파장 λ</a:t>
-            </a:r>
-          </a:p>
-          <a:p>
-            <a:pPr algn="l">
-              <a:spcBef>
-                <a:spcPts val="400"/>
-              </a:spcBef>
-              <a:spcAft>
-                <a:spcPts val="200"/>
-              </a:spcAft>
-              <a:defRPr sz="1600" b="1">
-                <a:solidFill>
-                  <a:srgbClr val="C0392B"/>
-                </a:solidFill>
-              </a:defRPr>
-            </a:pPr>
-            <a:r>
-              <a:t>▸ Boundary | 경계 조건</a:t>
-            </a:r>
-          </a:p>
-          <a:p>
-            <a:pPr algn="l">
-              <a:spcBef>
-                <a:spcPts val="0"/>
-              </a:spcBef>
-              <a:spcAft>
-                <a:spcPts val="200"/>
-              </a:spcAft>
-              <a:defRPr sz="1400" b="0">
-                <a:solidFill>
-                  <a:srgbClr val="222222"/>
-                </a:solidFill>
-              </a:defRPr>
-            </a:pPr>
-            <a:r>
-              <a:t>  Plane wave, finite 1D array</a:t>
-            </a:r>
-            <a:br/>
-            <a:r>
-              <a:t>평면파, 유한 1D 배열</a:t>
+              <a:defRPr sz="1600" b="0">
+                <a:solidFill>
+                  <a:srgbClr val="666677"/>
+                </a:solidFill>
+              </a:defRPr>
+            </a:pPr>
+            <a:r>
+              <a:t>    나노포토닉스, 플라즈모닉스, 메타서페이스 분야에서 널리 사용되는 표준 도구</a:t>
             </a:r>
           </a:p>
         </p:txBody>
@@ -5835,7 +6121,7 @@
               </a:defRPr>
             </a:pPr>
             <a:r>
-              <a:t>5. Input / Output</a:t>
+              <a:t>5. Model</a:t>
             </a:r>
           </a:p>
         </p:txBody>
@@ -5870,7 +6156,7 @@
               </a:defRPr>
             </a:pPr>
             <a:r>
-              <a:t>입출력</a:t>
+              <a:t>물리 모델</a:t>
             </a:r>
           </a:p>
         </p:txBody>
@@ -5883,8 +6169,8 @@
         </p:nvSpPr>
         <p:spPr>
           <a:xfrm>
-            <a:off x="731520" y="1463040"/>
-            <a:ext cx="5029200" cy="4114800"/>
+            <a:off x="731520" y="1371600"/>
+            <a:ext cx="5029200" cy="365760"/>
           </a:xfrm>
           <a:prstGeom prst="rect">
             <a:avLst/>
@@ -5898,460 +6184,21 @@
           <a:lstStyle/>
           <a:p>
             <a:pPr algn="l">
-              <a:defRPr sz="2200" b="1">
-                <a:solidFill>
-                  <a:srgbClr val="C0392B"/>
-                </a:solidFill>
-              </a:defRPr>
-            </a:pPr>
-            <a:r>
-              <a:t>Input | 입력</a:t>
-            </a:r>
-          </a:p>
-          <a:p>
-            <a:pPr algn="l">
-              <a:spcBef>
-                <a:spcPts val="400"/>
-              </a:spcBef>
-              <a:spcAft>
-                <a:spcPts val="200"/>
-              </a:spcAft>
-              <a:defRPr sz="1600" b="1">
+              <a:defRPr sz="1800" b="1">
                 <a:solidFill>
                   <a:srgbClr val="2E6BB0"/>
                 </a:solidFill>
               </a:defRPr>
             </a:pPr>
             <a:r>
-              <a:t>▸ Wavelength λ | 파장 λ</a:t>
-            </a:r>
-          </a:p>
-          <a:p>
-            <a:pPr algn="l">
-              <a:spcBef>
-                <a:spcPts val="0"/>
-              </a:spcBef>
-              <a:spcAft>
-                <a:spcPts val="200"/>
-              </a:spcAft>
-              <a:defRPr sz="1400" b="0">
-                <a:solidFill>
-                  <a:srgbClr val="222222"/>
-                </a:solidFill>
-              </a:defRPr>
-            </a:pPr>
-            <a:r>
-              <a:t>   → Design wavelength (normalized)</a:t>
-            </a:r>
-          </a:p>
-          <a:p>
-            <a:pPr algn="l">
-              <a:spcBef>
-                <a:spcPts val="400"/>
-              </a:spcBef>
-              <a:spcAft>
-                <a:spcPts val="200"/>
-              </a:spcAft>
-              <a:defRPr sz="1600" b="1">
-                <a:solidFill>
-                  <a:srgbClr val="2E6BB0"/>
-                </a:solidFill>
-              </a:defRPr>
-            </a:pPr>
-            <a:r>
-              <a:t>▸ Array period P | 배열 주기 P</a:t>
-            </a:r>
-          </a:p>
-          <a:p>
-            <a:pPr algn="l">
-              <a:spcBef>
-                <a:spcPts val="0"/>
-              </a:spcBef>
-              <a:spcAft>
-                <a:spcPts val="200"/>
-              </a:spcAft>
-              <a:defRPr sz="1400" b="0">
-                <a:solidFill>
-                  <a:srgbClr val="222222"/>
-                </a:solidFill>
-              </a:defRPr>
-            </a:pPr>
-            <a:r>
-              <a:t>   → 0.5λ ~ 2.0λ (sweep)</a:t>
-            </a:r>
-          </a:p>
-          <a:p>
-            <a:pPr algn="l">
-              <a:spcBef>
-                <a:spcPts val="400"/>
-              </a:spcBef>
-              <a:spcAft>
-                <a:spcPts val="200"/>
-              </a:spcAft>
-              <a:defRPr sz="1600" b="1">
-                <a:solidFill>
-                  <a:srgbClr val="2E6BB0"/>
-                </a:solidFill>
-              </a:defRPr>
-            </a:pPr>
-            <a:r>
-              <a:t>▸ Num. meta-atoms N | 메타 원자 수 N</a:t>
-            </a:r>
-          </a:p>
-          <a:p>
-            <a:pPr algn="l">
-              <a:spcBef>
-                <a:spcPts val="0"/>
-              </a:spcBef>
-              <a:spcAft>
-                <a:spcPts val="200"/>
-              </a:spcAft>
-              <a:defRPr sz="1400" b="0">
-                <a:solidFill>
-                  <a:srgbClr val="222222"/>
-                </a:solidFill>
-              </a:defRPr>
-            </a:pPr>
-            <a:r>
-              <a:t>   → 1D: 20 ~ 100</a:t>
-            </a:r>
-          </a:p>
-          <a:p>
-            <a:pPr algn="l">
-              <a:spcBef>
-                <a:spcPts val="400"/>
-              </a:spcBef>
-              <a:spcAft>
-                <a:spcPts val="200"/>
-              </a:spcAft>
-              <a:defRPr sz="1600" b="1">
-                <a:solidFill>
-                  <a:srgbClr val="2E6BB0"/>
-                </a:solidFill>
-              </a:defRPr>
-            </a:pPr>
-            <a:r>
-              <a:t>▸ Polarizability α | 분극률 α</a:t>
-            </a:r>
-          </a:p>
-          <a:p>
-            <a:pPr algn="l">
-              <a:spcBef>
-                <a:spcPts val="0"/>
-              </a:spcBef>
-              <a:spcAft>
-                <a:spcPts val="200"/>
-              </a:spcAft>
-              <a:defRPr sz="1400" b="0">
-                <a:solidFill>
-                  <a:srgbClr val="222222"/>
-                </a:solidFill>
-              </a:defRPr>
-            </a:pPr>
-            <a:r>
-              <a:t>   → Lorentzian model</a:t>
-            </a:r>
-          </a:p>
-          <a:p>
-            <a:pPr algn="l">
-              <a:spcBef>
-                <a:spcPts val="400"/>
-              </a:spcBef>
-              <a:spcAft>
-                <a:spcPts val="200"/>
-              </a:spcAft>
-              <a:defRPr sz="1600" b="1">
-                <a:solidFill>
-                  <a:srgbClr val="2E6BB0"/>
-                </a:solidFill>
-              </a:defRPr>
-            </a:pPr>
-            <a:r>
-              <a:t>▸ Resonance freq. ω₀ | 공진 주파수 ω₀</a:t>
-            </a:r>
-          </a:p>
-          <a:p>
-            <a:pPr algn="l">
-              <a:spcBef>
-                <a:spcPts val="0"/>
-              </a:spcBef>
-              <a:spcAft>
-                <a:spcPts val="200"/>
-              </a:spcAft>
-              <a:defRPr sz="1400" b="0">
-                <a:solidFill>
-                  <a:srgbClr val="222222"/>
-                </a:solidFill>
-              </a:defRPr>
-            </a:pPr>
-            <a:r>
-              <a:t>   → May vary per atom</a:t>
-            </a:r>
-          </a:p>
-          <a:p>
-            <a:pPr algn="l">
-              <a:spcBef>
-                <a:spcPts val="400"/>
-              </a:spcBef>
-              <a:spcAft>
-                <a:spcPts val="200"/>
-              </a:spcAft>
-              <a:defRPr sz="1600" b="1">
-                <a:solidFill>
-                  <a:srgbClr val="2E6BB0"/>
-                </a:solidFill>
-              </a:defRPr>
-            </a:pPr>
-            <a:r>
-              <a:t>▸ Incident wave | 입사파</a:t>
-            </a:r>
-          </a:p>
-          <a:p>
-            <a:pPr algn="l">
-              <a:spcBef>
-                <a:spcPts val="0"/>
-              </a:spcBef>
-              <a:spcAft>
-                <a:spcPts val="200"/>
-              </a:spcAft>
-              <a:defRPr sz="1400" b="0">
-                <a:solidFill>
-                  <a:srgbClr val="222222"/>
-                </a:solidFill>
-              </a:defRPr>
-            </a:pPr>
-            <a:r>
-              <a:t>   → Plane wave (normal incidence)</a:t>
-            </a:r>
-          </a:p>
-        </p:txBody>
-      </p:sp>
-      <p:sp>
-        <p:nvSpPr>
-          <p:cNvPr id="5" name="TextBox 4"/>
-          <p:cNvSpPr txBox="1"/>
-          <p:nvPr/>
-        </p:nvSpPr>
-        <p:spPr>
-          <a:xfrm>
-            <a:off x="6400800" y="1463040"/>
-            <a:ext cx="5029200" cy="4114800"/>
-          </a:xfrm>
-          <a:prstGeom prst="rect">
-            <a:avLst/>
-          </a:prstGeom>
-          <a:noFill/>
-        </p:spPr>
-        <p:txBody>
-          <a:bodyPr wrap="square">
-            <a:spAutoFit/>
-          </a:bodyPr>
-          <a:lstStyle/>
-          <a:p>
-            <a:pPr algn="l">
-              <a:defRPr sz="2200" b="1">
-                <a:solidFill>
-                  <a:srgbClr val="C0392B"/>
-                </a:solidFill>
-              </a:defRPr>
-            </a:pPr>
-            <a:r>
-              <a:t>Output | 출력</a:t>
-            </a:r>
-          </a:p>
-          <a:p>
-            <a:pPr algn="l">
-              <a:spcBef>
-                <a:spcPts val="400"/>
-              </a:spcBef>
-              <a:spcAft>
-                <a:spcPts val="200"/>
-              </a:spcAft>
-              <a:defRPr sz="1600" b="0">
-                <a:solidFill>
-                  <a:srgbClr val="222222"/>
-                </a:solidFill>
-              </a:defRPr>
-            </a:pPr>
-            <a:r>
-              <a:t>• Dipole moment pᵢ (complex)</a:t>
-            </a:r>
-          </a:p>
-          <a:p>
-            <a:pPr algn="l">
-              <a:spcBef>
-                <a:spcPts val="0"/>
-              </a:spcBef>
-              <a:spcAft>
-                <a:spcPts val="200"/>
-              </a:spcAft>
-              <a:defRPr sz="1400" b="0">
-                <a:solidFill>
-                  <a:srgbClr val="666677"/>
-                </a:solidFill>
-              </a:defRPr>
-            </a:pPr>
-            <a:r>
-              <a:t>  각 원자의 유도 쌍극자 모멘트 pᵢ (복소수)</a:t>
-            </a:r>
-          </a:p>
-          <a:p>
-            <a:pPr algn="l">
-              <a:spcBef>
-                <a:spcPts val="400"/>
-              </a:spcBef>
-              <a:spcAft>
-                <a:spcPts val="200"/>
-              </a:spcAft>
-              <a:defRPr sz="600" b="0">
-                <a:solidFill>
-                  <a:srgbClr val="222222"/>
-                </a:solidFill>
-              </a:defRPr>
-            </a:pPr>
-          </a:p>
-          <a:p>
-            <a:pPr algn="l">
-              <a:spcBef>
-                <a:spcPts val="400"/>
-              </a:spcBef>
-              <a:spcAft>
-                <a:spcPts val="200"/>
-              </a:spcAft>
-              <a:defRPr sz="1600" b="0">
-                <a:solidFill>
-                  <a:srgbClr val="222222"/>
-                </a:solidFill>
-              </a:defRPr>
-            </a:pPr>
-            <a:r>
-              <a:t>• Phase: arg(pᵢ) — actual phase in array</a:t>
-            </a:r>
-          </a:p>
-          <a:p>
-            <a:pPr algn="l">
-              <a:spcBef>
-                <a:spcPts val="0"/>
-              </a:spcBef>
-              <a:spcAft>
-                <a:spcPts val="200"/>
-              </a:spcAft>
-              <a:defRPr sz="1400" b="0">
-                <a:solidFill>
-                  <a:srgbClr val="666677"/>
-                </a:solidFill>
-              </a:defRPr>
-            </a:pPr>
-            <a:r>
-              <a:t>  pᵢ의 위상: 배열 내 실제 위상 응답</a:t>
-            </a:r>
-          </a:p>
-          <a:p>
-            <a:pPr algn="l">
-              <a:spcBef>
-                <a:spcPts val="400"/>
-              </a:spcBef>
-              <a:spcAft>
-                <a:spcPts val="200"/>
-              </a:spcAft>
-              <a:defRPr sz="600" b="0">
-                <a:solidFill>
-                  <a:srgbClr val="222222"/>
-                </a:solidFill>
-              </a:defRPr>
-            </a:pPr>
-          </a:p>
-          <a:p>
-            <a:pPr algn="l">
-              <a:spcBef>
-                <a:spcPts val="400"/>
-              </a:spcBef>
-              <a:spcAft>
-                <a:spcPts val="200"/>
-              </a:spcAft>
-              <a:defRPr sz="1600" b="0">
-                <a:solidFill>
-                  <a:srgbClr val="222222"/>
-                </a:solidFill>
-              </a:defRPr>
-            </a:pPr>
-            <a:r>
-              <a:t>• Isolated response: pᵢⁱˢᵒ = αᵢ · Eᵢₙ꜀</a:t>
-            </a:r>
-          </a:p>
-          <a:p>
-            <a:pPr algn="l">
-              <a:spcBef>
-                <a:spcPts val="0"/>
-              </a:spcBef>
-              <a:spcAft>
-                <a:spcPts val="200"/>
-              </a:spcAft>
-              <a:defRPr sz="1400" b="0">
-                <a:solidFill>
-                  <a:srgbClr val="666677"/>
-                </a:solidFill>
-              </a:defRPr>
-            </a:pPr>
-            <a:r>
-              <a:t>  고립 응답: pᵢⁱˢᵒ = αᵢ · Eᵢₙ꜀ (커플링 무시)</a:t>
-            </a:r>
-          </a:p>
-          <a:p>
-            <a:pPr algn="l">
-              <a:spcBef>
-                <a:spcPts val="400"/>
-              </a:spcBef>
-              <a:spcAft>
-                <a:spcPts val="200"/>
-              </a:spcAft>
-              <a:defRPr sz="600" b="0">
-                <a:solidFill>
-                  <a:srgbClr val="222222"/>
-                </a:solidFill>
-              </a:defRPr>
-            </a:pPr>
-          </a:p>
-        </p:txBody>
-      </p:sp>
-      <p:sp>
-        <p:nvSpPr>
-          <p:cNvPr id="6" name="TextBox 5"/>
-          <p:cNvSpPr txBox="1"/>
-          <p:nvPr/>
-        </p:nvSpPr>
-        <p:spPr>
-          <a:xfrm>
-            <a:off x="6400800" y="4114800"/>
-            <a:ext cx="5029200" cy="1371600"/>
-          </a:xfrm>
-          <a:prstGeom prst="rect">
-            <a:avLst/>
-          </a:prstGeom>
-          <a:noFill/>
-        </p:spPr>
-        <p:txBody>
-          <a:bodyPr wrap="square">
-            <a:spAutoFit/>
-          </a:bodyPr>
-          <a:lstStyle/>
-          <a:p>
-            <a:pPr algn="l">
-              <a:defRPr sz="1800" b="1">
-                <a:solidFill>
-                  <a:srgbClr val="C0392B"/>
-                </a:solidFill>
-              </a:defRPr>
-            </a:pPr>
-            <a:r>
-              <a:t>Key output | 핵심 출력:</a:t>
+              <a:t>Point dipole model | 점 쌍극자 모델:</a:t>
             </a:r>
           </a:p>
         </p:txBody>
       </p:sp>
       <p:pic>
         <p:nvPicPr>
-          <p:cNvPr id="7" name="Picture 6" descr="eq_db3714df.png"/>
+          <p:cNvPr id="5" name="Picture 4" descr="eq_6fe42867.png"/>
           <p:cNvPicPr>
             <a:picLocks noChangeAspect="1"/>
           </p:cNvPicPr>
@@ -6365,14 +6212,431 @@
         </p:blipFill>
         <p:spPr>
           <a:xfrm>
-            <a:off x="6675120" y="4572000"/>
-            <a:ext cx="4645529" cy="502920"/>
+            <a:off x="1188720" y="1783080"/>
+            <a:ext cx="2102569" cy="502920"/>
           </a:xfrm>
           <a:prstGeom prst="rect">
             <a:avLst/>
           </a:prstGeom>
         </p:spPr>
       </p:pic>
+      <p:sp>
+        <p:nvSpPr>
+          <p:cNvPr id="6" name="TextBox 5"/>
+          <p:cNvSpPr txBox="1"/>
+          <p:nvPr/>
+        </p:nvSpPr>
+        <p:spPr>
+          <a:xfrm>
+            <a:off x="731520" y="2423160"/>
+            <a:ext cx="5029200" cy="365760"/>
+          </a:xfrm>
+          <a:prstGeom prst="rect">
+            <a:avLst/>
+          </a:prstGeom>
+          <a:noFill/>
+        </p:spPr>
+        <p:txBody>
+          <a:bodyPr wrap="square">
+            <a:spAutoFit/>
+          </a:bodyPr>
+          <a:lstStyle/>
+          <a:p>
+            <a:pPr algn="l">
+              <a:defRPr sz="1800" b="1">
+                <a:solidFill>
+                  <a:srgbClr val="2E6BB0"/>
+                </a:solidFill>
+              </a:defRPr>
+            </a:pPr>
+            <a:r>
+              <a:t>Local electric field | 국소 전기장:</a:t>
+            </a:r>
+          </a:p>
+        </p:txBody>
+      </p:sp>
+      <p:pic>
+        <p:nvPicPr>
+          <p:cNvPr id="7" name="Picture 6" descr="eq_5c8d65f6.png"/>
+          <p:cNvPicPr>
+            <a:picLocks noChangeAspect="1"/>
+          </p:cNvPicPr>
+          <p:nvPr/>
+        </p:nvPicPr>
+        <p:blipFill>
+          <a:blip r:embed="rId3"/>
+          <a:stretch>
+            <a:fillRect/>
+          </a:stretch>
+        </p:blipFill>
+        <p:spPr>
+          <a:xfrm>
+            <a:off x="1188720" y="2834640"/>
+            <a:ext cx="2296089" cy="502920"/>
+          </a:xfrm>
+          <a:prstGeom prst="rect">
+            <a:avLst/>
+          </a:prstGeom>
+        </p:spPr>
+      </p:pic>
+      <p:sp>
+        <p:nvSpPr>
+          <p:cNvPr id="8" name="TextBox 7"/>
+          <p:cNvSpPr txBox="1"/>
+          <p:nvPr/>
+        </p:nvSpPr>
+        <p:spPr>
+          <a:xfrm>
+            <a:off x="731520" y="3474720"/>
+            <a:ext cx="5029200" cy="365760"/>
+          </a:xfrm>
+          <a:prstGeom prst="rect">
+            <a:avLst/>
+          </a:prstGeom>
+          <a:noFill/>
+        </p:spPr>
+        <p:txBody>
+          <a:bodyPr wrap="square">
+            <a:spAutoFit/>
+          </a:bodyPr>
+          <a:lstStyle/>
+          <a:p>
+            <a:pPr algn="l">
+              <a:defRPr sz="1800" b="1">
+                <a:solidFill>
+                  <a:srgbClr val="2E6BB0"/>
+                </a:solidFill>
+              </a:defRPr>
+            </a:pPr>
+            <a:r>
+              <a:t>Green's function (2D) | Green 함수:</a:t>
+            </a:r>
+          </a:p>
+        </p:txBody>
+      </p:sp>
+      <p:pic>
+        <p:nvPicPr>
+          <p:cNvPr id="9" name="Picture 8" descr="eq_22cce5ae.png"/>
+          <p:cNvPicPr>
+            <a:picLocks noChangeAspect="1"/>
+          </p:cNvPicPr>
+          <p:nvPr/>
+        </p:nvPicPr>
+        <p:blipFill>
+          <a:blip r:embed="rId4"/>
+          <a:stretch>
+            <a:fillRect/>
+          </a:stretch>
+        </p:blipFill>
+        <p:spPr>
+          <a:xfrm>
+            <a:off x="1188720" y="3886200"/>
+            <a:ext cx="2334656" cy="502920"/>
+          </a:xfrm>
+          <a:prstGeom prst="rect">
+            <a:avLst/>
+          </a:prstGeom>
+        </p:spPr>
+      </p:pic>
+      <p:sp>
+        <p:nvSpPr>
+          <p:cNvPr id="10" name="TextBox 9"/>
+          <p:cNvSpPr txBox="1"/>
+          <p:nvPr/>
+        </p:nvSpPr>
+        <p:spPr>
+          <a:xfrm>
+            <a:off x="731520" y="4526280"/>
+            <a:ext cx="5029200" cy="365760"/>
+          </a:xfrm>
+          <a:prstGeom prst="rect">
+            <a:avLst/>
+          </a:prstGeom>
+          <a:noFill/>
+        </p:spPr>
+        <p:txBody>
+          <a:bodyPr wrap="square">
+            <a:spAutoFit/>
+          </a:bodyPr>
+          <a:lstStyle/>
+          <a:p>
+            <a:pPr algn="l">
+              <a:defRPr sz="1800" b="1">
+                <a:solidFill>
+                  <a:srgbClr val="2E6BB0"/>
+                </a:solidFill>
+              </a:defRPr>
+            </a:pPr>
+            <a:r>
+              <a:t>Matrix form | 행렬 형태:</a:t>
+            </a:r>
+          </a:p>
+        </p:txBody>
+      </p:sp>
+      <p:pic>
+        <p:nvPicPr>
+          <p:cNvPr id="11" name="Picture 10" descr="eq_ff21cd11.png"/>
+          <p:cNvPicPr>
+            <a:picLocks noChangeAspect="1"/>
+          </p:cNvPicPr>
+          <p:nvPr/>
+        </p:nvPicPr>
+        <p:blipFill>
+          <a:blip r:embed="rId5"/>
+          <a:stretch>
+            <a:fillRect/>
+          </a:stretch>
+        </p:blipFill>
+        <p:spPr>
+          <a:xfrm>
+            <a:off x="1188720" y="4937760"/>
+            <a:ext cx="1868805" cy="502920"/>
+          </a:xfrm>
+          <a:prstGeom prst="rect">
+            <a:avLst/>
+          </a:prstGeom>
+        </p:spPr>
+      </p:pic>
+      <p:sp>
+        <p:nvSpPr>
+          <p:cNvPr id="12" name="TextBox 11"/>
+          <p:cNvSpPr txBox="1"/>
+          <p:nvPr/>
+        </p:nvSpPr>
+        <p:spPr>
+          <a:xfrm>
+            <a:off x="6400800" y="1371600"/>
+            <a:ext cx="5029200" cy="4114800"/>
+          </a:xfrm>
+          <a:prstGeom prst="rect">
+            <a:avLst/>
+          </a:prstGeom>
+          <a:noFill/>
+        </p:spPr>
+        <p:txBody>
+          <a:bodyPr wrap="square">
+            <a:spAutoFit/>
+          </a:bodyPr>
+          <a:lstStyle/>
+          <a:p>
+            <a:pPr algn="l">
+              <a:defRPr sz="1800" b="1">
+                <a:solidFill>
+                  <a:srgbClr val="2E6BB0"/>
+                </a:solidFill>
+              </a:defRPr>
+            </a:pPr>
+            <a:r>
+              <a:t>Matrix element:</a:t>
+            </a:r>
+          </a:p>
+        </p:txBody>
+      </p:sp>
+      <p:sp>
+        <p:nvSpPr>
+          <p:cNvPr id="13" name="TextBox 12"/>
+          <p:cNvSpPr txBox="1"/>
+          <p:nvPr/>
+        </p:nvSpPr>
+        <p:spPr>
+          <a:xfrm>
+            <a:off x="6675120" y="1920240"/>
+            <a:ext cx="4572000" cy="320040"/>
+          </a:xfrm>
+          <a:prstGeom prst="rect">
+            <a:avLst/>
+          </a:prstGeom>
+          <a:noFill/>
+        </p:spPr>
+        <p:txBody>
+          <a:bodyPr wrap="square">
+            <a:spAutoFit/>
+          </a:bodyPr>
+          <a:lstStyle/>
+          <a:p>
+            <a:pPr algn="l">
+              <a:defRPr sz="1800" b="0">
+                <a:solidFill>
+                  <a:srgbClr val="222222"/>
+                </a:solidFill>
+              </a:defRPr>
+            </a:pPr>
+            <a:r>
+              <a:t>A_ii = 1/αᵢ  ,   A_ij = −G(rᵢⱼ)  (i≠j)</a:t>
+            </a:r>
+          </a:p>
+        </p:txBody>
+      </p:sp>
+      <p:sp>
+        <p:nvSpPr>
+          <p:cNvPr id="14" name="TextBox 13"/>
+          <p:cNvSpPr txBox="1"/>
+          <p:nvPr/>
+        </p:nvSpPr>
+        <p:spPr>
+          <a:xfrm>
+            <a:off x="6400800" y="3017520"/>
+            <a:ext cx="5029200" cy="3200400"/>
+          </a:xfrm>
+          <a:prstGeom prst="rect">
+            <a:avLst/>
+          </a:prstGeom>
+          <a:noFill/>
+        </p:spPr>
+        <p:txBody>
+          <a:bodyPr wrap="square">
+            <a:spAutoFit/>
+          </a:bodyPr>
+          <a:lstStyle/>
+          <a:p>
+            <a:pPr algn="l">
+              <a:defRPr sz="1800" b="1">
+                <a:solidFill>
+                  <a:srgbClr val="2E6BB0"/>
+                </a:solidFill>
+              </a:defRPr>
+            </a:pPr>
+            <a:r>
+              <a:t>Key components | 주요 구성</a:t>
+            </a:r>
+          </a:p>
+          <a:p>
+            <a:pPr algn="l">
+              <a:spcBef>
+                <a:spcPts val="400"/>
+              </a:spcBef>
+              <a:spcAft>
+                <a:spcPts val="200"/>
+              </a:spcAft>
+              <a:defRPr sz="600" b="0">
+                <a:solidFill>
+                  <a:srgbClr val="222222"/>
+                </a:solidFill>
+              </a:defRPr>
+            </a:pPr>
+          </a:p>
+          <a:p>
+            <a:pPr algn="l">
+              <a:spcBef>
+                <a:spcPts val="400"/>
+              </a:spcBef>
+              <a:spcAft>
+                <a:spcPts val="200"/>
+              </a:spcAft>
+              <a:defRPr sz="1600" b="1">
+                <a:solidFill>
+                  <a:srgbClr val="C0392B"/>
+                </a:solidFill>
+              </a:defRPr>
+            </a:pPr>
+            <a:r>
+              <a:t>▸ State var | 상태 변수</a:t>
+            </a:r>
+          </a:p>
+          <a:p>
+            <a:pPr algn="l">
+              <a:spcBef>
+                <a:spcPts val="0"/>
+              </a:spcBef>
+              <a:spcAft>
+                <a:spcPts val="200"/>
+              </a:spcAft>
+              <a:defRPr sz="1400" b="0">
+                <a:solidFill>
+                  <a:srgbClr val="222222"/>
+                </a:solidFill>
+              </a:defRPr>
+            </a:pPr>
+            <a:r>
+              <a:t>  Dipole moment pᵢ (complex)</a:t>
+            </a:r>
+            <a:br/>
+            <a:r>
+              <a:t>쌍극자 모멘트 pᵢ (복소수)</a:t>
+            </a:r>
+          </a:p>
+          <a:p>
+            <a:pPr algn="l">
+              <a:spcBef>
+                <a:spcPts val="400"/>
+              </a:spcBef>
+              <a:spcAft>
+                <a:spcPts val="200"/>
+              </a:spcAft>
+              <a:defRPr sz="1600" b="1">
+                <a:solidFill>
+                  <a:srgbClr val="C0392B"/>
+                </a:solidFill>
+              </a:defRPr>
+            </a:pPr>
+            <a:r>
+              <a:t>▸ Parameters | 파라미터</a:t>
+            </a:r>
+          </a:p>
+          <a:p>
+            <a:pPr algn="l">
+              <a:spcBef>
+                <a:spcPts val="0"/>
+              </a:spcBef>
+              <a:spcAft>
+                <a:spcPts val="200"/>
+              </a:spcAft>
+              <a:defRPr sz="1400" b="0">
+                <a:solidFill>
+                  <a:srgbClr val="222222"/>
+                </a:solidFill>
+              </a:defRPr>
+            </a:pPr>
+            <a:r>
+              <a:t>  Period P, α (Lorentzian), λ</a:t>
+            </a:r>
+            <a:br/>
+            <a:r>
+              <a:t>주기 P, 분극률 α, 파장 λ</a:t>
+            </a:r>
+          </a:p>
+          <a:p>
+            <a:pPr algn="l">
+              <a:spcBef>
+                <a:spcPts val="400"/>
+              </a:spcBef>
+              <a:spcAft>
+                <a:spcPts val="200"/>
+              </a:spcAft>
+              <a:defRPr sz="1600" b="1">
+                <a:solidFill>
+                  <a:srgbClr val="C0392B"/>
+                </a:solidFill>
+              </a:defRPr>
+            </a:pPr>
+            <a:r>
+              <a:t>▸ Boundary | 경계 조건</a:t>
+            </a:r>
+          </a:p>
+          <a:p>
+            <a:pPr algn="l">
+              <a:spcBef>
+                <a:spcPts val="0"/>
+              </a:spcBef>
+              <a:spcAft>
+                <a:spcPts val="200"/>
+              </a:spcAft>
+              <a:defRPr sz="1400" b="0">
+                <a:solidFill>
+                  <a:srgbClr val="222222"/>
+                </a:solidFill>
+              </a:defRPr>
+            </a:pPr>
+            <a:r>
+              <a:t>  Plane wave, finite 1D array</a:t>
+            </a:r>
+            <a:br/>
+            <a:r>
+              <a:t>평면파, 유한 1D 배열</a:t>
+            </a:r>
+          </a:p>
+        </p:txBody>
+      </p:sp>
     </p:spTree>
   </p:cSld>
   <p:clrMapOvr>
@@ -6429,7 +6693,7 @@
               </a:defRPr>
             </a:pPr>
             <a:r>
-              <a:t>6. Quantitative Metrics</a:t>
+              <a:t>6. Input / Output</a:t>
             </a:r>
           </a:p>
         </p:txBody>
@@ -6464,7 +6728,7 @@
               </a:defRPr>
             </a:pPr>
             <a:r>
-              <a:t>측정 지표</a:t>
+              <a:t>입출력</a:t>
             </a:r>
           </a:p>
         </p:txBody>
@@ -6478,7 +6742,7 @@
         <p:spPr>
           <a:xfrm>
             <a:off x="731520" y="1463040"/>
-            <a:ext cx="10515600" cy="365760"/>
+            <a:ext cx="5029200" cy="4114800"/>
           </a:xfrm>
           <a:prstGeom prst="rect">
             <a:avLst/>
@@ -6492,6 +6756,445 @@
           <a:lstStyle/>
           <a:p>
             <a:pPr algn="l">
+              <a:defRPr sz="2200" b="1">
+                <a:solidFill>
+                  <a:srgbClr val="C0392B"/>
+                </a:solidFill>
+              </a:defRPr>
+            </a:pPr>
+            <a:r>
+              <a:t>Input | 입력</a:t>
+            </a:r>
+          </a:p>
+          <a:p>
+            <a:pPr algn="l">
+              <a:spcBef>
+                <a:spcPts val="400"/>
+              </a:spcBef>
+              <a:spcAft>
+                <a:spcPts val="200"/>
+              </a:spcAft>
+              <a:defRPr sz="1600" b="1">
+                <a:solidFill>
+                  <a:srgbClr val="2E6BB0"/>
+                </a:solidFill>
+              </a:defRPr>
+            </a:pPr>
+            <a:r>
+              <a:t>▸ Wavelength λ | 파장 λ</a:t>
+            </a:r>
+          </a:p>
+          <a:p>
+            <a:pPr algn="l">
+              <a:spcBef>
+                <a:spcPts val="0"/>
+              </a:spcBef>
+              <a:spcAft>
+                <a:spcPts val="200"/>
+              </a:spcAft>
+              <a:defRPr sz="1400" b="0">
+                <a:solidFill>
+                  <a:srgbClr val="222222"/>
+                </a:solidFill>
+              </a:defRPr>
+            </a:pPr>
+            <a:r>
+              <a:t>   → Design wavelength (normalized)</a:t>
+            </a:r>
+          </a:p>
+          <a:p>
+            <a:pPr algn="l">
+              <a:spcBef>
+                <a:spcPts val="400"/>
+              </a:spcBef>
+              <a:spcAft>
+                <a:spcPts val="200"/>
+              </a:spcAft>
+              <a:defRPr sz="1600" b="1">
+                <a:solidFill>
+                  <a:srgbClr val="2E6BB0"/>
+                </a:solidFill>
+              </a:defRPr>
+            </a:pPr>
+            <a:r>
+              <a:t>▸ Array period P | 배열 주기 P</a:t>
+            </a:r>
+          </a:p>
+          <a:p>
+            <a:pPr algn="l">
+              <a:spcBef>
+                <a:spcPts val="0"/>
+              </a:spcBef>
+              <a:spcAft>
+                <a:spcPts val="200"/>
+              </a:spcAft>
+              <a:defRPr sz="1400" b="0">
+                <a:solidFill>
+                  <a:srgbClr val="222222"/>
+                </a:solidFill>
+              </a:defRPr>
+            </a:pPr>
+            <a:r>
+              <a:t>   → 0.5λ ~ 2.0λ (sweep)</a:t>
+            </a:r>
+          </a:p>
+          <a:p>
+            <a:pPr algn="l">
+              <a:spcBef>
+                <a:spcPts val="400"/>
+              </a:spcBef>
+              <a:spcAft>
+                <a:spcPts val="200"/>
+              </a:spcAft>
+              <a:defRPr sz="1600" b="1">
+                <a:solidFill>
+                  <a:srgbClr val="2E6BB0"/>
+                </a:solidFill>
+              </a:defRPr>
+            </a:pPr>
+            <a:r>
+              <a:t>▸ Num. meta-atoms N | 메타 원자 수 N</a:t>
+            </a:r>
+          </a:p>
+          <a:p>
+            <a:pPr algn="l">
+              <a:spcBef>
+                <a:spcPts val="0"/>
+              </a:spcBef>
+              <a:spcAft>
+                <a:spcPts val="200"/>
+              </a:spcAft>
+              <a:defRPr sz="1400" b="0">
+                <a:solidFill>
+                  <a:srgbClr val="222222"/>
+                </a:solidFill>
+              </a:defRPr>
+            </a:pPr>
+            <a:r>
+              <a:t>   → 1D: 20 ~ 100</a:t>
+            </a:r>
+          </a:p>
+          <a:p>
+            <a:pPr algn="l">
+              <a:spcBef>
+                <a:spcPts val="400"/>
+              </a:spcBef>
+              <a:spcAft>
+                <a:spcPts val="200"/>
+              </a:spcAft>
+              <a:defRPr sz="1600" b="1">
+                <a:solidFill>
+                  <a:srgbClr val="2E6BB0"/>
+                </a:solidFill>
+              </a:defRPr>
+            </a:pPr>
+            <a:r>
+              <a:t>▸ Polarizability α | 분극률 α</a:t>
+            </a:r>
+          </a:p>
+          <a:p>
+            <a:pPr algn="l">
+              <a:spcBef>
+                <a:spcPts val="0"/>
+              </a:spcBef>
+              <a:spcAft>
+                <a:spcPts val="200"/>
+              </a:spcAft>
+              <a:defRPr sz="1400" b="0">
+                <a:solidFill>
+                  <a:srgbClr val="222222"/>
+                </a:solidFill>
+              </a:defRPr>
+            </a:pPr>
+            <a:r>
+              <a:t>   → Lorentzian model</a:t>
+            </a:r>
+          </a:p>
+          <a:p>
+            <a:pPr algn="l">
+              <a:spcBef>
+                <a:spcPts val="400"/>
+              </a:spcBef>
+              <a:spcAft>
+                <a:spcPts val="200"/>
+              </a:spcAft>
+              <a:defRPr sz="1600" b="1">
+                <a:solidFill>
+                  <a:srgbClr val="2E6BB0"/>
+                </a:solidFill>
+              </a:defRPr>
+            </a:pPr>
+            <a:r>
+              <a:t>▸ Resonance freq. ω₀ | 공진 주파수 ω₀</a:t>
+            </a:r>
+          </a:p>
+          <a:p>
+            <a:pPr algn="l">
+              <a:spcBef>
+                <a:spcPts val="0"/>
+              </a:spcBef>
+              <a:spcAft>
+                <a:spcPts val="200"/>
+              </a:spcAft>
+              <a:defRPr sz="1400" b="0">
+                <a:solidFill>
+                  <a:srgbClr val="222222"/>
+                </a:solidFill>
+              </a:defRPr>
+            </a:pPr>
+            <a:r>
+              <a:t>   → May vary per atom</a:t>
+            </a:r>
+          </a:p>
+          <a:p>
+            <a:pPr algn="l">
+              <a:spcBef>
+                <a:spcPts val="400"/>
+              </a:spcBef>
+              <a:spcAft>
+                <a:spcPts val="200"/>
+              </a:spcAft>
+              <a:defRPr sz="1600" b="1">
+                <a:solidFill>
+                  <a:srgbClr val="2E6BB0"/>
+                </a:solidFill>
+              </a:defRPr>
+            </a:pPr>
+            <a:r>
+              <a:t>▸ Incident wave | 입사파</a:t>
+            </a:r>
+          </a:p>
+          <a:p>
+            <a:pPr algn="l">
+              <a:spcBef>
+                <a:spcPts val="0"/>
+              </a:spcBef>
+              <a:spcAft>
+                <a:spcPts val="200"/>
+              </a:spcAft>
+              <a:defRPr sz="1400" b="0">
+                <a:solidFill>
+                  <a:srgbClr val="222222"/>
+                </a:solidFill>
+              </a:defRPr>
+            </a:pPr>
+            <a:r>
+              <a:t>   → Plane wave (normal incidence)</a:t>
+            </a:r>
+          </a:p>
+        </p:txBody>
+      </p:sp>
+      <p:sp>
+        <p:nvSpPr>
+          <p:cNvPr id="5" name="TextBox 4"/>
+          <p:cNvSpPr txBox="1"/>
+          <p:nvPr/>
+        </p:nvSpPr>
+        <p:spPr>
+          <a:xfrm>
+            <a:off x="6400800" y="1463040"/>
+            <a:ext cx="5029200" cy="4114800"/>
+          </a:xfrm>
+          <a:prstGeom prst="rect">
+            <a:avLst/>
+          </a:prstGeom>
+          <a:noFill/>
+        </p:spPr>
+        <p:txBody>
+          <a:bodyPr wrap="square">
+            <a:spAutoFit/>
+          </a:bodyPr>
+          <a:lstStyle/>
+          <a:p>
+            <a:pPr algn="l">
+              <a:defRPr sz="2200" b="1">
+                <a:solidFill>
+                  <a:srgbClr val="C0392B"/>
+                </a:solidFill>
+              </a:defRPr>
+            </a:pPr>
+            <a:r>
+              <a:t>Output | 출력</a:t>
+            </a:r>
+          </a:p>
+          <a:p>
+            <a:pPr algn="l">
+              <a:spcBef>
+                <a:spcPts val="400"/>
+              </a:spcBef>
+              <a:spcAft>
+                <a:spcPts val="200"/>
+              </a:spcAft>
+              <a:defRPr sz="1600" b="0">
+                <a:solidFill>
+                  <a:srgbClr val="222222"/>
+                </a:solidFill>
+              </a:defRPr>
+            </a:pPr>
+            <a:r>
+              <a:t>• Dipole moment pᵢ (complex)</a:t>
+            </a:r>
+          </a:p>
+          <a:p>
+            <a:pPr algn="l">
+              <a:spcBef>
+                <a:spcPts val="0"/>
+              </a:spcBef>
+              <a:spcAft>
+                <a:spcPts val="200"/>
+              </a:spcAft>
+              <a:defRPr sz="1400" b="0">
+                <a:solidFill>
+                  <a:srgbClr val="666677"/>
+                </a:solidFill>
+              </a:defRPr>
+            </a:pPr>
+            <a:r>
+              <a:t>  각 원자의 유도 쌍극자 모멘트 pᵢ (복소수)</a:t>
+            </a:r>
+          </a:p>
+          <a:p>
+            <a:pPr algn="l">
+              <a:spcBef>
+                <a:spcPts val="400"/>
+              </a:spcBef>
+              <a:spcAft>
+                <a:spcPts val="200"/>
+              </a:spcAft>
+              <a:defRPr sz="600" b="0">
+                <a:solidFill>
+                  <a:srgbClr val="222222"/>
+                </a:solidFill>
+              </a:defRPr>
+            </a:pPr>
+          </a:p>
+          <a:p>
+            <a:pPr algn="l">
+              <a:spcBef>
+                <a:spcPts val="400"/>
+              </a:spcBef>
+              <a:spcAft>
+                <a:spcPts val="200"/>
+              </a:spcAft>
+              <a:defRPr sz="1600" b="0">
+                <a:solidFill>
+                  <a:srgbClr val="222222"/>
+                </a:solidFill>
+              </a:defRPr>
+            </a:pPr>
+            <a:r>
+              <a:t>• Phase: arg(pᵢ) — actual phase in array</a:t>
+            </a:r>
+          </a:p>
+          <a:p>
+            <a:pPr algn="l">
+              <a:spcBef>
+                <a:spcPts val="0"/>
+              </a:spcBef>
+              <a:spcAft>
+                <a:spcPts val="200"/>
+              </a:spcAft>
+              <a:defRPr sz="1400" b="0">
+                <a:solidFill>
+                  <a:srgbClr val="666677"/>
+                </a:solidFill>
+              </a:defRPr>
+            </a:pPr>
+            <a:r>
+              <a:t>  pᵢ의 위상: 배열 내 실제 위상 응답</a:t>
+            </a:r>
+          </a:p>
+          <a:p>
+            <a:pPr algn="l">
+              <a:spcBef>
+                <a:spcPts val="400"/>
+              </a:spcBef>
+              <a:spcAft>
+                <a:spcPts val="200"/>
+              </a:spcAft>
+              <a:defRPr sz="600" b="0">
+                <a:solidFill>
+                  <a:srgbClr val="222222"/>
+                </a:solidFill>
+              </a:defRPr>
+            </a:pPr>
+          </a:p>
+          <a:p>
+            <a:pPr algn="l">
+              <a:spcBef>
+                <a:spcPts val="400"/>
+              </a:spcBef>
+              <a:spcAft>
+                <a:spcPts val="200"/>
+              </a:spcAft>
+              <a:defRPr sz="1600" b="0">
+                <a:solidFill>
+                  <a:srgbClr val="222222"/>
+                </a:solidFill>
+              </a:defRPr>
+            </a:pPr>
+            <a:r>
+              <a:t>• Isolated response: pᵢⁱˢᵒ = αᵢ · Eᵢₙ꜀</a:t>
+            </a:r>
+          </a:p>
+          <a:p>
+            <a:pPr algn="l">
+              <a:spcBef>
+                <a:spcPts val="0"/>
+              </a:spcBef>
+              <a:spcAft>
+                <a:spcPts val="200"/>
+              </a:spcAft>
+              <a:defRPr sz="1400" b="0">
+                <a:solidFill>
+                  <a:srgbClr val="666677"/>
+                </a:solidFill>
+              </a:defRPr>
+            </a:pPr>
+            <a:r>
+              <a:t>  고립 응답: pᵢⁱˢᵒ = αᵢ · Eᵢₙ꜀ (커플링 무시)</a:t>
+            </a:r>
+          </a:p>
+          <a:p>
+            <a:pPr algn="l">
+              <a:spcBef>
+                <a:spcPts val="400"/>
+              </a:spcBef>
+              <a:spcAft>
+                <a:spcPts val="200"/>
+              </a:spcAft>
+              <a:defRPr sz="600" b="0">
+                <a:solidFill>
+                  <a:srgbClr val="222222"/>
+                </a:solidFill>
+              </a:defRPr>
+            </a:pPr>
+          </a:p>
+        </p:txBody>
+      </p:sp>
+      <p:sp>
+        <p:nvSpPr>
+          <p:cNvPr id="6" name="TextBox 5"/>
+          <p:cNvSpPr txBox="1"/>
+          <p:nvPr/>
+        </p:nvSpPr>
+        <p:spPr>
+          <a:xfrm>
+            <a:off x="6400800" y="4114800"/>
+            <a:ext cx="5029200" cy="1371600"/>
+          </a:xfrm>
+          <a:prstGeom prst="rect">
+            <a:avLst/>
+          </a:prstGeom>
+          <a:noFill/>
+        </p:spPr>
+        <p:txBody>
+          <a:bodyPr wrap="square">
+            <a:spAutoFit/>
+          </a:bodyPr>
+          <a:lstStyle/>
+          <a:p>
+            <a:pPr algn="l">
               <a:defRPr sz="1800" b="1">
                 <a:solidFill>
                   <a:srgbClr val="C0392B"/>
@@ -6499,14 +7202,14 @@
               </a:defRPr>
             </a:pPr>
             <a:r>
-              <a:t>1. Mean Phase Deviation | 평균 위상 편차</a:t>
+              <a:t>Key output | 핵심 출력:</a:t>
             </a:r>
           </a:p>
         </p:txBody>
       </p:sp>
       <p:pic>
         <p:nvPicPr>
-          <p:cNvPr id="5" name="Picture 4" descr="eq_2212bbfd.png"/>
+          <p:cNvPr id="7" name="Picture 6" descr="eq_76667d05.png"/>
           <p:cNvPicPr>
             <a:picLocks noChangeAspect="1"/>
           </p:cNvPicPr>
@@ -6520,244 +7223,14 @@
         </p:blipFill>
         <p:spPr>
           <a:xfrm>
-            <a:off x="1188720" y="1874520"/>
-            <a:ext cx="1139383" cy="502920"/>
+            <a:off x="6675120" y="4572000"/>
+            <a:ext cx="4645529" cy="502920"/>
           </a:xfrm>
           <a:prstGeom prst="rect">
             <a:avLst/>
           </a:prstGeom>
         </p:spPr>
       </p:pic>
-      <p:sp>
-        <p:nvSpPr>
-          <p:cNvPr id="6" name="TextBox 5"/>
-          <p:cNvSpPr txBox="1"/>
-          <p:nvPr/>
-        </p:nvSpPr>
-        <p:spPr>
-          <a:xfrm>
-            <a:off x="731520" y="2606040"/>
-            <a:ext cx="10515600" cy="365760"/>
-          </a:xfrm>
-          <a:prstGeom prst="rect">
-            <a:avLst/>
-          </a:prstGeom>
-          <a:noFill/>
-        </p:spPr>
-        <p:txBody>
-          <a:bodyPr wrap="square">
-            <a:spAutoFit/>
-          </a:bodyPr>
-          <a:lstStyle/>
-          <a:p>
-            <a:pPr algn="l">
-              <a:defRPr sz="1800" b="1">
-                <a:solidFill>
-                  <a:srgbClr val="C0392B"/>
-                </a:solidFill>
-              </a:defRPr>
-            </a:pPr>
-            <a:r>
-              <a:t>2. Max Phase Deviation | 최대 위상 편차</a:t>
-            </a:r>
-          </a:p>
-        </p:txBody>
-      </p:sp>
-      <p:pic>
-        <p:nvPicPr>
-          <p:cNvPr id="7" name="Picture 6" descr="eq_93c005c5.png"/>
-          <p:cNvPicPr>
-            <a:picLocks noChangeAspect="1"/>
-          </p:cNvPicPr>
-          <p:nvPr/>
-        </p:nvPicPr>
-        <p:blipFill>
-          <a:blip r:embed="rId3"/>
-          <a:stretch>
-            <a:fillRect/>
-          </a:stretch>
-        </p:blipFill>
-        <p:spPr>
-          <a:xfrm>
-            <a:off x="1188720" y="3017520"/>
-            <a:ext cx="2335992" cy="502920"/>
-          </a:xfrm>
-          <a:prstGeom prst="rect">
-            <a:avLst/>
-          </a:prstGeom>
-        </p:spPr>
-      </p:pic>
-      <p:sp>
-        <p:nvSpPr>
-          <p:cNvPr id="8" name="TextBox 7"/>
-          <p:cNvSpPr txBox="1"/>
-          <p:nvPr/>
-        </p:nvSpPr>
-        <p:spPr>
-          <a:xfrm>
-            <a:off x="731520" y="3749040"/>
-            <a:ext cx="10515600" cy="365760"/>
-          </a:xfrm>
-          <a:prstGeom prst="rect">
-            <a:avLst/>
-          </a:prstGeom>
-          <a:noFill/>
-        </p:spPr>
-        <p:txBody>
-          <a:bodyPr wrap="square">
-            <a:spAutoFit/>
-          </a:bodyPr>
-          <a:lstStyle/>
-          <a:p>
-            <a:pPr algn="l">
-              <a:defRPr sz="1800" b="1">
-                <a:solidFill>
-                  <a:srgbClr val="C0392B"/>
-                </a:solidFill>
-              </a:defRPr>
-            </a:pPr>
-            <a:r>
-              <a:t>3. Amplitude Distortion Ratio | 진폭 왜곡 비</a:t>
-            </a:r>
-          </a:p>
-        </p:txBody>
-      </p:sp>
-      <p:pic>
-        <p:nvPicPr>
-          <p:cNvPr id="9" name="Picture 8" descr="eq_64d6dcf2.png"/>
-          <p:cNvPicPr>
-            <a:picLocks noChangeAspect="1"/>
-          </p:cNvPicPr>
-          <p:nvPr/>
-        </p:nvPicPr>
-        <p:blipFill>
-          <a:blip r:embed="rId4"/>
-          <a:stretch>
-            <a:fillRect/>
-          </a:stretch>
-        </p:blipFill>
-        <p:spPr>
-          <a:xfrm>
-            <a:off x="1188720" y="4160520"/>
-            <a:ext cx="1392979" cy="502920"/>
-          </a:xfrm>
-          <a:prstGeom prst="rect">
-            <a:avLst/>
-          </a:prstGeom>
-        </p:spPr>
-      </p:pic>
-      <p:sp>
-        <p:nvSpPr>
-          <p:cNvPr id="10" name="TextBox 9"/>
-          <p:cNvSpPr txBox="1"/>
-          <p:nvPr/>
-        </p:nvSpPr>
-        <p:spPr>
-          <a:xfrm>
-            <a:off x="731520" y="4892040"/>
-            <a:ext cx="10515600" cy="365760"/>
-          </a:xfrm>
-          <a:prstGeom prst="rect">
-            <a:avLst/>
-          </a:prstGeom>
-          <a:noFill/>
-        </p:spPr>
-        <p:txBody>
-          <a:bodyPr wrap="square">
-            <a:spAutoFit/>
-          </a:bodyPr>
-          <a:lstStyle/>
-          <a:p>
-            <a:pPr algn="l">
-              <a:defRPr sz="1800" b="1">
-                <a:solidFill>
-                  <a:srgbClr val="C0392B"/>
-                </a:solidFill>
-              </a:defRPr>
-            </a:pPr>
-            <a:r>
-              <a:t>4. Optical Theorem Check | 에너지 보존 검증</a:t>
-            </a:r>
-          </a:p>
-        </p:txBody>
-      </p:sp>
-      <p:pic>
-        <p:nvPicPr>
-          <p:cNvPr id="11" name="Picture 10" descr="eq_5fc55fb3.png"/>
-          <p:cNvPicPr>
-            <a:picLocks noChangeAspect="1"/>
-          </p:cNvPicPr>
-          <p:nvPr/>
-        </p:nvPicPr>
-        <p:blipFill>
-          <a:blip r:embed="rId5"/>
-          <a:stretch>
-            <a:fillRect/>
-          </a:stretch>
-        </p:blipFill>
-        <p:spPr>
-          <a:xfrm>
-            <a:off x="1188720" y="5303520"/>
-            <a:ext cx="2336259" cy="502920"/>
-          </a:xfrm>
-          <a:prstGeom prst="rect">
-            <a:avLst/>
-          </a:prstGeom>
-        </p:spPr>
-      </p:pic>
-      <p:sp>
-        <p:nvSpPr>
-          <p:cNvPr id="12" name="TextBox 11"/>
-          <p:cNvSpPr txBox="1"/>
-          <p:nvPr/>
-        </p:nvSpPr>
-        <p:spPr>
-          <a:xfrm>
-            <a:off x="731520" y="6126480"/>
-            <a:ext cx="10515600" cy="457200"/>
-          </a:xfrm>
-          <a:prstGeom prst="rect">
-            <a:avLst/>
-          </a:prstGeom>
-          <a:noFill/>
-        </p:spPr>
-        <p:txBody>
-          <a:bodyPr wrap="square">
-            <a:spAutoFit/>
-          </a:bodyPr>
-          <a:lstStyle/>
-          <a:p>
-            <a:pPr algn="l">
-              <a:defRPr sz="1600" b="0">
-                <a:solidFill>
-                  <a:srgbClr val="666677"/>
-                </a:solidFill>
-              </a:defRPr>
-            </a:pPr>
-            <a:r>
-              <a:t>Primary metric: plot  Δφ̄(P)  vs period P → quantify coupling effect</a:t>
-            </a:r>
-          </a:p>
-          <a:p>
-            <a:pPr algn="l">
-              <a:spcBef>
-                <a:spcPts val="0"/>
-              </a:spcBef>
-              <a:spcAft>
-                <a:spcPts val="200"/>
-              </a:spcAft>
-              <a:defRPr sz="1400" b="0">
-                <a:solidFill>
-                  <a:srgbClr val="666677"/>
-                </a:solidFill>
-              </a:defRPr>
-            </a:pPr>
-            <a:r>
-              <a:t>주요 지표: Δφ̄(P) vs 주기 P 그래프 → 커플링 영향 정량화</a:t>
-            </a:r>
-          </a:p>
-        </p:txBody>
-      </p:sp>
     </p:spTree>
   </p:cSld>
   <p:clrMapOvr>
@@ -6814,7 +7287,7 @@
               </a:defRPr>
             </a:pPr>
             <a:r>
-              <a:t>7. Controlled Comparison</a:t>
+              <a:t>7. Quantitative Metrics</a:t>
             </a:r>
           </a:p>
         </p:txBody>
@@ -6849,7 +7322,7 @@
               </a:defRPr>
             </a:pPr>
             <a:r>
-              <a:t>비교 실험 설계</a:t>
+              <a:t>측정 지표</a:t>
             </a:r>
           </a:p>
         </p:txBody>
@@ -6862,8 +7335,8 @@
         </p:nvSpPr>
         <p:spPr>
           <a:xfrm>
-            <a:off x="731520" y="1371600"/>
-            <a:ext cx="5029200" cy="457200"/>
+            <a:off x="731520" y="1463040"/>
+            <a:ext cx="10515600" cy="365760"/>
           </a:xfrm>
           <a:prstGeom prst="rect">
             <a:avLst/>
@@ -6877,28 +7350,52 @@
           <a:lstStyle/>
           <a:p>
             <a:pPr algn="l">
-              <a:defRPr sz="2000" b="1">
+              <a:defRPr sz="1800" b="1">
                 <a:solidFill>
                   <a:srgbClr val="C0392B"/>
                 </a:solidFill>
               </a:defRPr>
             </a:pPr>
             <a:r>
-              <a:t>Main: Period Sweep | 메인: 주기 스윕</a:t>
-            </a:r>
-          </a:p>
-        </p:txBody>
-      </p:sp>
-      <p:sp>
-        <p:nvSpPr>
-          <p:cNvPr id="5" name="TextBox 4"/>
+              <a:t>1. Mean Phase Deviation | 평균 위상 편차</a:t>
+            </a:r>
+          </a:p>
+        </p:txBody>
+      </p:sp>
+      <p:pic>
+        <p:nvPicPr>
+          <p:cNvPr id="5" name="Picture 4" descr="eq_dc55cd77.png"/>
+          <p:cNvPicPr>
+            <a:picLocks noChangeAspect="1"/>
+          </p:cNvPicPr>
+          <p:nvPr/>
+        </p:nvPicPr>
+        <p:blipFill>
+          <a:blip r:embed="rId2"/>
+          <a:stretch>
+            <a:fillRect/>
+          </a:stretch>
+        </p:blipFill>
+        <p:spPr>
+          <a:xfrm>
+            <a:off x="1188720" y="1874520"/>
+            <a:ext cx="1139383" cy="502920"/>
+          </a:xfrm>
+          <a:prstGeom prst="rect">
+            <a:avLst/>
+          </a:prstGeom>
+        </p:spPr>
+      </p:pic>
+      <p:sp>
+        <p:nvSpPr>
+          <p:cNvPr id="6" name="TextBox 5"/>
           <p:cNvSpPr txBox="1"/>
           <p:nvPr/>
         </p:nvSpPr>
         <p:spPr>
           <a:xfrm>
-            <a:off x="731520" y="2011680"/>
-            <a:ext cx="2468880" cy="320040"/>
+            <a:off x="731520" y="2606040"/>
+            <a:ext cx="10515600" cy="365760"/>
           </a:xfrm>
           <a:prstGeom prst="rect">
             <a:avLst/>
@@ -6912,28 +7409,52 @@
           <a:lstStyle/>
           <a:p>
             <a:pPr algn="l">
-              <a:defRPr sz="1500" b="1">
-                <a:solidFill>
-                  <a:srgbClr val="1A478A"/>
-                </a:solidFill>
-              </a:defRPr>
-            </a:pPr>
-            <a:r>
-              <a:t>Period</a:t>
-            </a:r>
-          </a:p>
-        </p:txBody>
-      </p:sp>
-      <p:sp>
-        <p:nvSpPr>
-          <p:cNvPr id="6" name="TextBox 5"/>
+              <a:defRPr sz="1800" b="1">
+                <a:solidFill>
+                  <a:srgbClr val="C0392B"/>
+                </a:solidFill>
+              </a:defRPr>
+            </a:pPr>
+            <a:r>
+              <a:t>2. Max Phase Deviation | 최대 위상 편차</a:t>
+            </a:r>
+          </a:p>
+        </p:txBody>
+      </p:sp>
+      <p:pic>
+        <p:nvPicPr>
+          <p:cNvPr id="7" name="Picture 6" descr="eq_2f0dd614.png"/>
+          <p:cNvPicPr>
+            <a:picLocks noChangeAspect="1"/>
+          </p:cNvPicPr>
+          <p:nvPr/>
+        </p:nvPicPr>
+        <p:blipFill>
+          <a:blip r:embed="rId3"/>
+          <a:stretch>
+            <a:fillRect/>
+          </a:stretch>
+        </p:blipFill>
+        <p:spPr>
+          <a:xfrm>
+            <a:off x="1188720" y="3017520"/>
+            <a:ext cx="2335992" cy="502920"/>
+          </a:xfrm>
+          <a:prstGeom prst="rect">
+            <a:avLst/>
+          </a:prstGeom>
+        </p:spPr>
+      </p:pic>
+      <p:sp>
+        <p:nvSpPr>
+          <p:cNvPr id="8" name="TextBox 7"/>
           <p:cNvSpPr txBox="1"/>
           <p:nvPr/>
         </p:nvSpPr>
         <p:spPr>
           <a:xfrm>
-            <a:off x="3200400" y="2011680"/>
-            <a:ext cx="1828800" cy="320040"/>
+            <a:off x="731520" y="3749040"/>
+            <a:ext cx="10515600" cy="365760"/>
           </a:xfrm>
           <a:prstGeom prst="rect">
             <a:avLst/>
@@ -6947,28 +7468,52 @@
           <a:lstStyle/>
           <a:p>
             <a:pPr algn="l">
-              <a:defRPr sz="1500" b="1">
-                <a:solidFill>
-                  <a:srgbClr val="1A478A"/>
-                </a:solidFill>
-              </a:defRPr>
-            </a:pPr>
-            <a:r>
-              <a:t>P/λ</a:t>
-            </a:r>
-          </a:p>
-        </p:txBody>
-      </p:sp>
-      <p:sp>
-        <p:nvSpPr>
-          <p:cNvPr id="7" name="TextBox 6"/>
+              <a:defRPr sz="1800" b="1">
+                <a:solidFill>
+                  <a:srgbClr val="C0392B"/>
+                </a:solidFill>
+              </a:defRPr>
+            </a:pPr>
+            <a:r>
+              <a:t>3. Amplitude Distortion Ratio | 진폭 왜곡 비</a:t>
+            </a:r>
+          </a:p>
+        </p:txBody>
+      </p:sp>
+      <p:pic>
+        <p:nvPicPr>
+          <p:cNvPr id="9" name="Picture 8" descr="eq_78c716dc.png"/>
+          <p:cNvPicPr>
+            <a:picLocks noChangeAspect="1"/>
+          </p:cNvPicPr>
+          <p:nvPr/>
+        </p:nvPicPr>
+        <p:blipFill>
+          <a:blip r:embed="rId4"/>
+          <a:stretch>
+            <a:fillRect/>
+          </a:stretch>
+        </p:blipFill>
+        <p:spPr>
+          <a:xfrm>
+            <a:off x="1188720" y="4160520"/>
+            <a:ext cx="1392979" cy="502920"/>
+          </a:xfrm>
+          <a:prstGeom prst="rect">
+            <a:avLst/>
+          </a:prstGeom>
+        </p:spPr>
+      </p:pic>
+      <p:sp>
+        <p:nvSpPr>
+          <p:cNvPr id="10" name="TextBox 9"/>
           <p:cNvSpPr txBox="1"/>
           <p:nvPr/>
         </p:nvSpPr>
         <p:spPr>
           <a:xfrm>
-            <a:off x="5029200" y="2011680"/>
-            <a:ext cx="2286000" cy="320040"/>
+            <a:off x="731520" y="4892040"/>
+            <a:ext cx="10515600" cy="365760"/>
           </a:xfrm>
           <a:prstGeom prst="rect">
             <a:avLst/>
@@ -6982,28 +7527,52 @@
           <a:lstStyle/>
           <a:p>
             <a:pPr algn="l">
-              <a:defRPr sz="1500" b="1">
-                <a:solidFill>
-                  <a:srgbClr val="1A478A"/>
-                </a:solidFill>
-              </a:defRPr>
-            </a:pPr>
-            <a:r>
-              <a:t>Coupling</a:t>
-            </a:r>
-          </a:p>
-        </p:txBody>
-      </p:sp>
-      <p:sp>
-        <p:nvSpPr>
-          <p:cNvPr id="8" name="TextBox 7"/>
+              <a:defRPr sz="1800" b="1">
+                <a:solidFill>
+                  <a:srgbClr val="C0392B"/>
+                </a:solidFill>
+              </a:defRPr>
+            </a:pPr>
+            <a:r>
+              <a:t>4. Optical Theorem Check | 에너지 보존 검증</a:t>
+            </a:r>
+          </a:p>
+        </p:txBody>
+      </p:sp>
+      <p:pic>
+        <p:nvPicPr>
+          <p:cNvPr id="11" name="Picture 10" descr="eq_b04154e8.png"/>
+          <p:cNvPicPr>
+            <a:picLocks noChangeAspect="1"/>
+          </p:cNvPicPr>
+          <p:nvPr/>
+        </p:nvPicPr>
+        <p:blipFill>
+          <a:blip r:embed="rId5"/>
+          <a:stretch>
+            <a:fillRect/>
+          </a:stretch>
+        </p:blipFill>
+        <p:spPr>
+          <a:xfrm>
+            <a:off x="1188720" y="5303520"/>
+            <a:ext cx="2336259" cy="502920"/>
+          </a:xfrm>
+          <a:prstGeom prst="rect">
+            <a:avLst/>
+          </a:prstGeom>
+        </p:spPr>
+      </p:pic>
+      <p:sp>
+        <p:nvSpPr>
+          <p:cNvPr id="12" name="TextBox 11"/>
           <p:cNvSpPr txBox="1"/>
           <p:nvPr/>
         </p:nvSpPr>
         <p:spPr>
           <a:xfrm>
-            <a:off x="7315200" y="2011680"/>
-            <a:ext cx="3657600" cy="320040"/>
+            <a:off x="731520" y="6126480"/>
+            <a:ext cx="10515600" cy="457200"/>
           </a:xfrm>
           <a:prstGeom prst="rect">
             <a:avLst/>
@@ -7017,751 +7586,32 @@
           <a:lstStyle/>
           <a:p>
             <a:pPr algn="l">
-              <a:defRPr sz="1500" b="1">
-                <a:solidFill>
-                  <a:srgbClr val="1A478A"/>
-                </a:solidFill>
-              </a:defRPr>
-            </a:pPr>
-            <a:r>
-              <a:t>Expected Distortion</a:t>
-            </a:r>
-          </a:p>
-        </p:txBody>
-      </p:sp>
-      <p:sp>
-        <p:nvSpPr>
-          <p:cNvPr id="9" name="TextBox 8"/>
-          <p:cNvSpPr txBox="1"/>
-          <p:nvPr/>
-        </p:nvSpPr>
-        <p:spPr>
-          <a:xfrm>
-            <a:off x="731520" y="2377440"/>
-            <a:ext cx="2468880" cy="320040"/>
-          </a:xfrm>
-          <a:prstGeom prst="rect">
-            <a:avLst/>
-          </a:prstGeom>
-          <a:noFill/>
-        </p:spPr>
-        <p:txBody>
-          <a:bodyPr wrap="square">
-            <a:spAutoFit/>
-          </a:bodyPr>
-          <a:lstStyle/>
-          <a:p>
-            <a:pPr algn="l">
+              <a:defRPr sz="1600" b="0">
+                <a:solidFill>
+                  <a:srgbClr val="666677"/>
+                </a:solidFill>
+              </a:defRPr>
+            </a:pPr>
+            <a:r>
+              <a:t>Primary metric: plot  Δφ̄(P)  vs period P → quantify coupling effect</a:t>
+            </a:r>
+          </a:p>
+          <a:p>
+            <a:pPr algn="l">
+              <a:spcBef>
+                <a:spcPts val="0"/>
+              </a:spcBef>
+              <a:spcAft>
+                <a:spcPts val="200"/>
+              </a:spcAft>
               <a:defRPr sz="1400" b="0">
                 <a:solidFill>
-                  <a:srgbClr val="222222"/>
-                </a:solidFill>
-              </a:defRPr>
-            </a:pPr>
-            <a:r>
-              <a:t>Dense | 밀집</a:t>
-            </a:r>
-          </a:p>
-        </p:txBody>
-      </p:sp>
-      <p:sp>
-        <p:nvSpPr>
-          <p:cNvPr id="10" name="TextBox 9"/>
-          <p:cNvSpPr txBox="1"/>
-          <p:nvPr/>
-        </p:nvSpPr>
-        <p:spPr>
-          <a:xfrm>
-            <a:off x="3200400" y="2377440"/>
-            <a:ext cx="1828800" cy="320040"/>
-          </a:xfrm>
-          <a:prstGeom prst="rect">
-            <a:avLst/>
-          </a:prstGeom>
-          <a:noFill/>
-        </p:spPr>
-        <p:txBody>
-          <a:bodyPr wrap="square">
-            <a:spAutoFit/>
-          </a:bodyPr>
-          <a:lstStyle/>
-          <a:p>
-            <a:pPr algn="l">
-              <a:defRPr sz="1400" b="0">
-                <a:solidFill>
-                  <a:srgbClr val="222222"/>
-                </a:solidFill>
-              </a:defRPr>
-            </a:pPr>
-            <a:r>
-              <a:t>0.5</a:t>
-            </a:r>
-          </a:p>
-        </p:txBody>
-      </p:sp>
-      <p:sp>
-        <p:nvSpPr>
-          <p:cNvPr id="11" name="TextBox 10"/>
-          <p:cNvSpPr txBox="1"/>
-          <p:nvPr/>
-        </p:nvSpPr>
-        <p:spPr>
-          <a:xfrm>
-            <a:off x="5029200" y="2377440"/>
-            <a:ext cx="2286000" cy="320040"/>
-          </a:xfrm>
-          <a:prstGeom prst="rect">
-            <a:avLst/>
-          </a:prstGeom>
-          <a:noFill/>
-        </p:spPr>
-        <p:txBody>
-          <a:bodyPr wrap="square">
-            <a:spAutoFit/>
-          </a:bodyPr>
-          <a:lstStyle/>
-          <a:p>
-            <a:pPr algn="l">
-              <a:defRPr sz="1400" b="0">
-                <a:solidFill>
-                  <a:srgbClr val="222222"/>
-                </a:solidFill>
-              </a:defRPr>
-            </a:pPr>
-            <a:r>
-              <a:t>Strong | 강함</a:t>
-            </a:r>
-          </a:p>
-        </p:txBody>
-      </p:sp>
-      <p:sp>
-        <p:nvSpPr>
-          <p:cNvPr id="12" name="TextBox 11"/>
-          <p:cNvSpPr txBox="1"/>
-          <p:nvPr/>
-        </p:nvSpPr>
-        <p:spPr>
-          <a:xfrm>
-            <a:off x="7315200" y="2377440"/>
-            <a:ext cx="3657600" cy="320040"/>
-          </a:xfrm>
-          <a:prstGeom prst="rect">
-            <a:avLst/>
-          </a:prstGeom>
-          <a:noFill/>
-        </p:spPr>
-        <p:txBody>
-          <a:bodyPr wrap="square">
-            <a:spAutoFit/>
-          </a:bodyPr>
-          <a:lstStyle/>
-          <a:p>
-            <a:pPr algn="l">
-              <a:defRPr sz="1400" b="0">
-                <a:solidFill>
-                  <a:srgbClr val="222222"/>
-                </a:solidFill>
-              </a:defRPr>
-            </a:pPr>
-            <a:r>
-              <a:t>Large distortion | 큰 왜곡</a:t>
-            </a:r>
-          </a:p>
-        </p:txBody>
-      </p:sp>
-      <p:sp>
-        <p:nvSpPr>
-          <p:cNvPr id="13" name="TextBox 12"/>
-          <p:cNvSpPr txBox="1"/>
-          <p:nvPr/>
-        </p:nvSpPr>
-        <p:spPr>
-          <a:xfrm>
-            <a:off x="731520" y="2743200"/>
-            <a:ext cx="2468880" cy="320040"/>
-          </a:xfrm>
-          <a:prstGeom prst="rect">
-            <a:avLst/>
-          </a:prstGeom>
-          <a:noFill/>
-        </p:spPr>
-        <p:txBody>
-          <a:bodyPr wrap="square">
-            <a:spAutoFit/>
-          </a:bodyPr>
-          <a:lstStyle/>
-          <a:p>
-            <a:pPr algn="l">
-              <a:defRPr sz="1400" b="0">
-                <a:solidFill>
-                  <a:srgbClr val="222222"/>
-                </a:solidFill>
-              </a:defRPr>
-            </a:pPr>
-            <a:r>
-              <a:t>Medium | 중간</a:t>
-            </a:r>
-          </a:p>
-        </p:txBody>
-      </p:sp>
-      <p:sp>
-        <p:nvSpPr>
-          <p:cNvPr id="14" name="TextBox 13"/>
-          <p:cNvSpPr txBox="1"/>
-          <p:nvPr/>
-        </p:nvSpPr>
-        <p:spPr>
-          <a:xfrm>
-            <a:off x="3200400" y="2743200"/>
-            <a:ext cx="1828800" cy="320040"/>
-          </a:xfrm>
-          <a:prstGeom prst="rect">
-            <a:avLst/>
-          </a:prstGeom>
-          <a:noFill/>
-        </p:spPr>
-        <p:txBody>
-          <a:bodyPr wrap="square">
-            <a:spAutoFit/>
-          </a:bodyPr>
-          <a:lstStyle/>
-          <a:p>
-            <a:pPr algn="l">
-              <a:defRPr sz="1400" b="0">
-                <a:solidFill>
-                  <a:srgbClr val="222222"/>
-                </a:solidFill>
-              </a:defRPr>
-            </a:pPr>
-            <a:r>
-              <a:t>1.0</a:t>
-            </a:r>
-          </a:p>
-        </p:txBody>
-      </p:sp>
-      <p:sp>
-        <p:nvSpPr>
-          <p:cNvPr id="15" name="TextBox 14"/>
-          <p:cNvSpPr txBox="1"/>
-          <p:nvPr/>
-        </p:nvSpPr>
-        <p:spPr>
-          <a:xfrm>
-            <a:off x="5029200" y="2743200"/>
-            <a:ext cx="2286000" cy="320040"/>
-          </a:xfrm>
-          <a:prstGeom prst="rect">
-            <a:avLst/>
-          </a:prstGeom>
-          <a:noFill/>
-        </p:spPr>
-        <p:txBody>
-          <a:bodyPr wrap="square">
-            <a:spAutoFit/>
-          </a:bodyPr>
-          <a:lstStyle/>
-          <a:p>
-            <a:pPr algn="l">
-              <a:defRPr sz="1400" b="0">
-                <a:solidFill>
-                  <a:srgbClr val="222222"/>
-                </a:solidFill>
-              </a:defRPr>
-            </a:pPr>
-            <a:r>
-              <a:t>Moderate | 중간</a:t>
-            </a:r>
-          </a:p>
-        </p:txBody>
-      </p:sp>
-      <p:sp>
-        <p:nvSpPr>
-          <p:cNvPr id="16" name="TextBox 15"/>
-          <p:cNvSpPr txBox="1"/>
-          <p:nvPr/>
-        </p:nvSpPr>
-        <p:spPr>
-          <a:xfrm>
-            <a:off x="7315200" y="2743200"/>
-            <a:ext cx="3657600" cy="320040"/>
-          </a:xfrm>
-          <a:prstGeom prst="rect">
-            <a:avLst/>
-          </a:prstGeom>
-          <a:noFill/>
-        </p:spPr>
-        <p:txBody>
-          <a:bodyPr wrap="square">
-            <a:spAutoFit/>
-          </a:bodyPr>
-          <a:lstStyle/>
-          <a:p>
-            <a:pPr algn="l">
-              <a:defRPr sz="1400" b="0">
-                <a:solidFill>
-                  <a:srgbClr val="222222"/>
-                </a:solidFill>
-              </a:defRPr>
-            </a:pPr>
-            <a:r>
-              <a:t>Measurable | 측정 가능</a:t>
-            </a:r>
-          </a:p>
-        </p:txBody>
-      </p:sp>
-      <p:sp>
-        <p:nvSpPr>
-          <p:cNvPr id="17" name="TextBox 16"/>
-          <p:cNvSpPr txBox="1"/>
-          <p:nvPr/>
-        </p:nvSpPr>
-        <p:spPr>
-          <a:xfrm>
-            <a:off x="731520" y="3108960"/>
-            <a:ext cx="2468880" cy="320040"/>
-          </a:xfrm>
-          <a:prstGeom prst="rect">
-            <a:avLst/>
-          </a:prstGeom>
-          <a:noFill/>
-        </p:spPr>
-        <p:txBody>
-          <a:bodyPr wrap="square">
-            <a:spAutoFit/>
-          </a:bodyPr>
-          <a:lstStyle/>
-          <a:p>
-            <a:pPr algn="l">
-              <a:defRPr sz="1400" b="0">
-                <a:solidFill>
-                  <a:srgbClr val="222222"/>
-                </a:solidFill>
-              </a:defRPr>
-            </a:pPr>
-            <a:r>
-              <a:t>Sparse | 희박</a:t>
-            </a:r>
-          </a:p>
-        </p:txBody>
-      </p:sp>
-      <p:sp>
-        <p:nvSpPr>
-          <p:cNvPr id="18" name="TextBox 17"/>
-          <p:cNvSpPr txBox="1"/>
-          <p:nvPr/>
-        </p:nvSpPr>
-        <p:spPr>
-          <a:xfrm>
-            <a:off x="3200400" y="3108960"/>
-            <a:ext cx="1828800" cy="320040"/>
-          </a:xfrm>
-          <a:prstGeom prst="rect">
-            <a:avLst/>
-          </a:prstGeom>
-          <a:noFill/>
-        </p:spPr>
-        <p:txBody>
-          <a:bodyPr wrap="square">
-            <a:spAutoFit/>
-          </a:bodyPr>
-          <a:lstStyle/>
-          <a:p>
-            <a:pPr algn="l">
-              <a:defRPr sz="1400" b="0">
-                <a:solidFill>
-                  <a:srgbClr val="222222"/>
-                </a:solidFill>
-              </a:defRPr>
-            </a:pPr>
-            <a:r>
-              <a:t>1.5</a:t>
-            </a:r>
-          </a:p>
-        </p:txBody>
-      </p:sp>
-      <p:sp>
-        <p:nvSpPr>
-          <p:cNvPr id="19" name="TextBox 18"/>
-          <p:cNvSpPr txBox="1"/>
-          <p:nvPr/>
-        </p:nvSpPr>
-        <p:spPr>
-          <a:xfrm>
-            <a:off x="5029200" y="3108960"/>
-            <a:ext cx="2286000" cy="320040"/>
-          </a:xfrm>
-          <a:prstGeom prst="rect">
-            <a:avLst/>
-          </a:prstGeom>
-          <a:noFill/>
-        </p:spPr>
-        <p:txBody>
-          <a:bodyPr wrap="square">
-            <a:spAutoFit/>
-          </a:bodyPr>
-          <a:lstStyle/>
-          <a:p>
-            <a:pPr algn="l">
-              <a:defRPr sz="1400" b="0">
-                <a:solidFill>
-                  <a:srgbClr val="222222"/>
-                </a:solidFill>
-              </a:defRPr>
-            </a:pPr>
-            <a:r>
-              <a:t>Weak | 약함</a:t>
-            </a:r>
-          </a:p>
-        </p:txBody>
-      </p:sp>
-      <p:sp>
-        <p:nvSpPr>
-          <p:cNvPr id="20" name="TextBox 19"/>
-          <p:cNvSpPr txBox="1"/>
-          <p:nvPr/>
-        </p:nvSpPr>
-        <p:spPr>
-          <a:xfrm>
-            <a:off x="7315200" y="3108960"/>
-            <a:ext cx="3657600" cy="320040"/>
-          </a:xfrm>
-          <a:prstGeom prst="rect">
-            <a:avLst/>
-          </a:prstGeom>
-          <a:noFill/>
-        </p:spPr>
-        <p:txBody>
-          <a:bodyPr wrap="square">
-            <a:spAutoFit/>
-          </a:bodyPr>
-          <a:lstStyle/>
-          <a:p>
-            <a:pPr algn="l">
-              <a:defRPr sz="1400" b="0">
-                <a:solidFill>
-                  <a:srgbClr val="222222"/>
-                </a:solidFill>
-              </a:defRPr>
-            </a:pPr>
-            <a:r>
-              <a:t>Small | 작음</a:t>
-            </a:r>
-          </a:p>
-        </p:txBody>
-      </p:sp>
-      <p:sp>
-        <p:nvSpPr>
-          <p:cNvPr id="21" name="TextBox 20"/>
-          <p:cNvSpPr txBox="1"/>
-          <p:nvPr/>
-        </p:nvSpPr>
-        <p:spPr>
-          <a:xfrm>
-            <a:off x="731520" y="3474720"/>
-            <a:ext cx="2468880" cy="320040"/>
-          </a:xfrm>
-          <a:prstGeom prst="rect">
-            <a:avLst/>
-          </a:prstGeom>
-          <a:noFill/>
-        </p:spPr>
-        <p:txBody>
-          <a:bodyPr wrap="square">
-            <a:spAutoFit/>
-          </a:bodyPr>
-          <a:lstStyle/>
-          <a:p>
-            <a:pPr algn="l">
-              <a:defRPr sz="1400" b="0">
-                <a:solidFill>
-                  <a:srgbClr val="222222"/>
-                </a:solidFill>
-              </a:defRPr>
-            </a:pPr>
-            <a:r>
-              <a:t>Very sparse | 매우 희박</a:t>
-            </a:r>
-          </a:p>
-        </p:txBody>
-      </p:sp>
-      <p:sp>
-        <p:nvSpPr>
-          <p:cNvPr id="22" name="TextBox 21"/>
-          <p:cNvSpPr txBox="1"/>
-          <p:nvPr/>
-        </p:nvSpPr>
-        <p:spPr>
-          <a:xfrm>
-            <a:off x="3200400" y="3474720"/>
-            <a:ext cx="1828800" cy="320040"/>
-          </a:xfrm>
-          <a:prstGeom prst="rect">
-            <a:avLst/>
-          </a:prstGeom>
-          <a:noFill/>
-        </p:spPr>
-        <p:txBody>
-          <a:bodyPr wrap="square">
-            <a:spAutoFit/>
-          </a:bodyPr>
-          <a:lstStyle/>
-          <a:p>
-            <a:pPr algn="l">
-              <a:defRPr sz="1400" b="0">
-                <a:solidFill>
-                  <a:srgbClr val="222222"/>
-                </a:solidFill>
-              </a:defRPr>
-            </a:pPr>
-            <a:r>
-              <a:t>2.0</a:t>
-            </a:r>
-          </a:p>
-        </p:txBody>
-      </p:sp>
-      <p:sp>
-        <p:nvSpPr>
-          <p:cNvPr id="23" name="TextBox 22"/>
-          <p:cNvSpPr txBox="1"/>
-          <p:nvPr/>
-        </p:nvSpPr>
-        <p:spPr>
-          <a:xfrm>
-            <a:off x="5029200" y="3474720"/>
-            <a:ext cx="2286000" cy="320040"/>
-          </a:xfrm>
-          <a:prstGeom prst="rect">
-            <a:avLst/>
-          </a:prstGeom>
-          <a:noFill/>
-        </p:spPr>
-        <p:txBody>
-          <a:bodyPr wrap="square">
-            <a:spAutoFit/>
-          </a:bodyPr>
-          <a:lstStyle/>
-          <a:p>
-            <a:pPr algn="l">
-              <a:defRPr sz="1400" b="0">
-                <a:solidFill>
-                  <a:srgbClr val="222222"/>
-                </a:solidFill>
-              </a:defRPr>
-            </a:pPr>
-            <a:r>
-              <a:t>Negligible | 무시 가능</a:t>
-            </a:r>
-          </a:p>
-        </p:txBody>
-      </p:sp>
-      <p:sp>
-        <p:nvSpPr>
-          <p:cNvPr id="24" name="TextBox 23"/>
-          <p:cNvSpPr txBox="1"/>
-          <p:nvPr/>
-        </p:nvSpPr>
-        <p:spPr>
-          <a:xfrm>
-            <a:off x="7315200" y="3474720"/>
-            <a:ext cx="3657600" cy="320040"/>
-          </a:xfrm>
-          <a:prstGeom prst="rect">
-            <a:avLst/>
-          </a:prstGeom>
-          <a:noFill/>
-        </p:spPr>
-        <p:txBody>
-          <a:bodyPr wrap="square">
-            <a:spAutoFit/>
-          </a:bodyPr>
-          <a:lstStyle/>
-          <a:p>
-            <a:pPr algn="l">
-              <a:defRPr sz="1400" b="0">
-                <a:solidFill>
-                  <a:srgbClr val="222222"/>
-                </a:solidFill>
-              </a:defRPr>
-            </a:pPr>
-            <a:r>
-              <a:t>Baseline | 기준선</a:t>
-            </a:r>
-          </a:p>
-        </p:txBody>
-      </p:sp>
-      <p:sp>
-        <p:nvSpPr>
-          <p:cNvPr id="25" name="TextBox 24"/>
-          <p:cNvSpPr txBox="1"/>
-          <p:nvPr/>
-        </p:nvSpPr>
-        <p:spPr>
-          <a:xfrm>
-            <a:off x="731520" y="4114800"/>
-            <a:ext cx="10515600" cy="457200"/>
-          </a:xfrm>
-          <a:prstGeom prst="rect">
-            <a:avLst/>
-          </a:prstGeom>
-          <a:noFill/>
-        </p:spPr>
-        <p:txBody>
-          <a:bodyPr wrap="square">
-            <a:spAutoFit/>
-          </a:bodyPr>
-          <a:lstStyle/>
-          <a:p>
-            <a:pPr algn="l">
-              <a:defRPr sz="2000" b="1">
-                <a:solidFill>
-                  <a:srgbClr val="C0392B"/>
-                </a:solidFill>
-              </a:defRPr>
-            </a:pPr>
-            <a:r>
-              <a:t>Additional: Uniform vs Non-uniform Array | 추가: 균일 vs 비균일 배열</a:t>
-            </a:r>
-          </a:p>
-        </p:txBody>
-      </p:sp>
-      <p:sp>
-        <p:nvSpPr>
-          <p:cNvPr id="26" name="TextBox 25"/>
-          <p:cNvSpPr txBox="1"/>
-          <p:nvPr/>
-        </p:nvSpPr>
-        <p:spPr>
-          <a:xfrm>
-            <a:off x="731520" y="4754880"/>
-            <a:ext cx="5029200" cy="1645920"/>
-          </a:xfrm>
-          <a:prstGeom prst="rect">
-            <a:avLst/>
-          </a:prstGeom>
-          <a:noFill/>
-        </p:spPr>
-        <p:txBody>
-          <a:bodyPr wrap="square">
-            <a:spAutoFit/>
-          </a:bodyPr>
-          <a:lstStyle/>
-          <a:p>
-            <a:pPr algn="l">
-              <a:defRPr sz="1800" b="1">
-                <a:solidFill>
-                  <a:srgbClr val="2E6BB0"/>
-                </a:solidFill>
-              </a:defRPr>
-            </a:pPr>
-            <a:r>
-              <a:t>▸ Uniform array | 균일 배열</a:t>
-            </a:r>
-          </a:p>
-          <a:p>
-            <a:pPr algn="l">
-              <a:spcBef>
-                <a:spcPts val="400"/>
-              </a:spcBef>
-              <a:spcAft>
-                <a:spcPts val="200"/>
-              </a:spcAft>
-              <a:defRPr sz="1500" b="0">
-                <a:solidFill>
-                  <a:srgbClr val="222222"/>
-                </a:solidFill>
-              </a:defRPr>
-            </a:pPr>
-            <a:r>
-              <a:t>All atoms identical (same α)</a:t>
-            </a:r>
-          </a:p>
-          <a:p>
-            <a:pPr algn="l">
-              <a:spcBef>
-                <a:spcPts val="0"/>
-              </a:spcBef>
-              <a:spcAft>
-                <a:spcPts val="200"/>
-              </a:spcAft>
-              <a:defRPr sz="1400" b="0">
-                <a:solidFill>
                   <a:srgbClr val="666677"/>
                 </a:solidFill>
               </a:defRPr>
             </a:pPr>
             <a:r>
-              <a:t>모든 메타 원자 동일 → 순수 격자 커플링 분리</a:t>
-            </a:r>
-          </a:p>
-        </p:txBody>
-      </p:sp>
-      <p:sp>
-        <p:nvSpPr>
-          <p:cNvPr id="27" name="TextBox 26"/>
-          <p:cNvSpPr txBox="1"/>
-          <p:nvPr/>
-        </p:nvSpPr>
-        <p:spPr>
-          <a:xfrm>
-            <a:off x="6217920" y="4754880"/>
-            <a:ext cx="5029200" cy="1645920"/>
-          </a:xfrm>
-          <a:prstGeom prst="rect">
-            <a:avLst/>
-          </a:prstGeom>
-          <a:noFill/>
-        </p:spPr>
-        <p:txBody>
-          <a:bodyPr wrap="square">
-            <a:spAutoFit/>
-          </a:bodyPr>
-          <a:lstStyle/>
-          <a:p>
-            <a:pPr algn="l">
-              <a:defRPr sz="1800" b="1">
-                <a:solidFill>
-                  <a:srgbClr val="2E6BB0"/>
-                </a:solidFill>
-              </a:defRPr>
-            </a:pPr>
-            <a:r>
-              <a:t>▸ Non-uniform array | 비균일 배열</a:t>
-            </a:r>
-          </a:p>
-          <a:p>
-            <a:pPr algn="l">
-              <a:spcBef>
-                <a:spcPts val="400"/>
-              </a:spcBef>
-              <a:spcAft>
-                <a:spcPts val="200"/>
-              </a:spcAft>
-              <a:defRPr sz="1500" b="0">
-                <a:solidFill>
-                  <a:srgbClr val="222222"/>
-                </a:solidFill>
-              </a:defRPr>
-            </a:pPr>
-            <a:r>
-              <a:t>Each atom has different α (phase gradient)</a:t>
-            </a:r>
-          </a:p>
-          <a:p>
-            <a:pPr algn="l">
-              <a:spcBef>
-                <a:spcPts val="0"/>
-              </a:spcBef>
-              <a:spcAft>
-                <a:spcPts val="200"/>
-              </a:spcAft>
-              <a:defRPr sz="1400" b="0">
-                <a:solidFill>
-                  <a:srgbClr val="666677"/>
-                </a:solidFill>
-              </a:defRPr>
-            </a:pPr>
-            <a:r>
-              <a:t>각 원자 α 상이 → 실제 메타렌즈 상황과 유사</a:t>
+              <a:t>주요 지표: Δφ̄(P) vs 주기 P 그래프 → 커플링 영향 정량화</a:t>
             </a:r>
           </a:p>
         </p:txBody>
@@ -7822,7 +7672,7 @@
               </a:defRPr>
             </a:pPr>
             <a:r>
-              <a:t>8. Verification Plan</a:t>
+              <a:t>8. Controlled Comparison</a:t>
             </a:r>
           </a:p>
         </p:txBody>
@@ -7857,383 +7707,830 @@
               </a:defRPr>
             </a:pPr>
             <a:r>
-              <a:t>검증 계획</a:t>
-            </a:r>
-          </a:p>
-        </p:txBody>
-      </p:sp>
-      <p:sp>
-        <p:nvSpPr>
-          <p:cNvPr id="4" name="Rectangle 3"/>
-          <p:cNvSpPr/>
+              <a:t>비교 실험 설계</a:t>
+            </a:r>
+          </a:p>
+        </p:txBody>
+      </p:sp>
+      <p:sp>
+        <p:nvSpPr>
+          <p:cNvPr id="4" name="TextBox 3"/>
+          <p:cNvSpPr txBox="1"/>
           <p:nvPr/>
         </p:nvSpPr>
         <p:spPr>
           <a:xfrm>
-            <a:off x="548640" y="1463040"/>
-            <a:ext cx="5303520" cy="1554480"/>
+            <a:off x="731520" y="1371600"/>
+            <a:ext cx="5029200" cy="457200"/>
           </a:xfrm>
           <a:prstGeom prst="rect">
             <a:avLst/>
           </a:prstGeom>
-          <a:solidFill>
-            <a:srgbClr val="F0F4FA"/>
-          </a:solidFill>
-          <a:ln w="12700">
-            <a:solidFill>
-              <a:srgbClr val="304060"/>
-            </a:solidFill>
-          </a:ln>
-        </p:spPr>
-        <p:style>
-          <a:lnRef idx="1">
-            <a:schemeClr val="accent1"/>
-          </a:lnRef>
-          <a:fillRef idx="3">
-            <a:schemeClr val="accent1"/>
-          </a:fillRef>
-          <a:effectRef idx="2">
-            <a:schemeClr val="accent1"/>
-          </a:effectRef>
-          <a:fontRef idx="minor">
-            <a:schemeClr val="lt1"/>
-          </a:fontRef>
-        </p:style>
-        <p:txBody>
-          <a:bodyPr rtlCol="0" anchor="ctr" wrap="square"/>
-          <a:lstStyle/>
-          <a:p>
-            <a:pPr algn="l">
-              <a:defRPr sz="1600" b="1">
+          <a:noFill/>
+        </p:spPr>
+        <p:txBody>
+          <a:bodyPr wrap="square">
+            <a:spAutoFit/>
+          </a:bodyPr>
+          <a:lstStyle/>
+          <a:p>
+            <a:pPr algn="l">
+              <a:defRPr sz="2000" b="1">
                 <a:solidFill>
                   <a:srgbClr val="C0392B"/>
                 </a:solidFill>
               </a:defRPr>
             </a:pPr>
             <a:r>
-              <a:t>1. Analytical Comparison | 해석해 비교</a:t>
-            </a:r>
-          </a:p>
-          <a:p>
-            <a:pPr algn="l">
-              <a:spcBef>
-                <a:spcPts val="0"/>
-              </a:spcBef>
-              <a:spcAft>
-                <a:spcPts val="200"/>
-              </a:spcAft>
-              <a:defRPr sz="1200" b="0">
-                <a:solidFill>
-                  <a:srgbClr val="666677"/>
-                </a:solidFill>
-              </a:defRPr>
-            </a:pPr>
-            <a:r>
-              <a:t>[Sanity Check]</a:t>
-            </a:r>
-          </a:p>
-          <a:p>
-            <a:pPr algn="l">
-              <a:spcBef>
-                <a:spcPts val="400"/>
-              </a:spcBef>
-              <a:spcAft>
-                <a:spcPts val="200"/>
-              </a:spcAft>
-              <a:defRPr sz="1300" b="0">
-                <a:solidFill>
-                  <a:srgbClr val="222222"/>
-                </a:solidFill>
-              </a:defRPr>
-            </a:pPr>
-            <a:r>
-              <a:t>  • Single atom: CDA result vs p = α · E_inc</a:t>
-            </a:r>
-            <a:br/>
-            <a:r>
-              <a:t>1개 원자: CDA 결과 vs 직접 계산</a:t>
-            </a:r>
-          </a:p>
-          <a:p>
-            <a:pPr algn="l">
-              <a:spcBef>
-                <a:spcPts val="400"/>
-              </a:spcBef>
-              <a:spcAft>
-                <a:spcPts val="200"/>
-              </a:spcAft>
-              <a:defRPr sz="1300" b="0">
-                <a:solidFill>
-                  <a:srgbClr val="222222"/>
-                </a:solidFill>
-              </a:defRPr>
-            </a:pPr>
-            <a:r>
-              <a:t>  • Two atoms: compare with analytical 2-dipole solution</a:t>
-            </a:r>
-            <a:br/>
-            <a:r>
-              <a:t>2개 원자: 해석적 해와 비교</a:t>
-            </a:r>
-          </a:p>
-        </p:txBody>
-      </p:sp>
-      <p:sp>
-        <p:nvSpPr>
-          <p:cNvPr id="5" name="Rectangle 4"/>
-          <p:cNvSpPr/>
+              <a:t>Main: Period Sweep | 메인: 주기 스윕</a:t>
+            </a:r>
+          </a:p>
+        </p:txBody>
+      </p:sp>
+      <p:sp>
+        <p:nvSpPr>
+          <p:cNvPr id="5" name="TextBox 4"/>
+          <p:cNvSpPr txBox="1"/>
           <p:nvPr/>
         </p:nvSpPr>
         <p:spPr>
           <a:xfrm>
-            <a:off x="548640" y="3291840"/>
-            <a:ext cx="5303520" cy="1554480"/>
+            <a:off x="731520" y="2011680"/>
+            <a:ext cx="2468880" cy="320040"/>
           </a:xfrm>
           <a:prstGeom prst="rect">
             <a:avLst/>
           </a:prstGeom>
-          <a:solidFill>
-            <a:srgbClr val="F0F4FA"/>
-          </a:solidFill>
-          <a:ln w="12700">
-            <a:solidFill>
-              <a:srgbClr val="304060"/>
-            </a:solidFill>
-          </a:ln>
-        </p:spPr>
-        <p:style>
-          <a:lnRef idx="1">
-            <a:schemeClr val="accent1"/>
-          </a:lnRef>
-          <a:fillRef idx="3">
-            <a:schemeClr val="accent1"/>
-          </a:fillRef>
-          <a:effectRef idx="2">
-            <a:schemeClr val="accent1"/>
-          </a:effectRef>
-          <a:fontRef idx="minor">
-            <a:schemeClr val="lt1"/>
-          </a:fontRef>
-        </p:style>
-        <p:txBody>
-          <a:bodyPr rtlCol="0" anchor="ctr" wrap="square"/>
-          <a:lstStyle/>
-          <a:p>
-            <a:pPr algn="l">
-              <a:defRPr sz="1600" b="1">
-                <a:solidFill>
-                  <a:srgbClr val="C0392B"/>
-                </a:solidFill>
-              </a:defRPr>
-            </a:pPr>
-            <a:r>
-              <a:t>2. Limiting Case | 극한 검증</a:t>
-            </a:r>
-          </a:p>
-          <a:p>
-            <a:pPr algn="l">
-              <a:spcBef>
-                <a:spcPts val="0"/>
-              </a:spcBef>
-              <a:spcAft>
-                <a:spcPts val="200"/>
-              </a:spcAft>
-              <a:defRPr sz="1200" b="0">
-                <a:solidFill>
-                  <a:srgbClr val="666677"/>
-                </a:solidFill>
-              </a:defRPr>
-            </a:pPr>
-            <a:r>
-              <a:t>[Consistency Check]</a:t>
-            </a:r>
-          </a:p>
-          <a:p>
-            <a:pPr algn="l">
-              <a:spcBef>
-                <a:spcPts val="400"/>
-              </a:spcBef>
-              <a:spcAft>
-                <a:spcPts val="200"/>
-              </a:spcAft>
-              <a:defRPr sz="1300" b="0">
-                <a:solidFill>
-                  <a:srgbClr val="222222"/>
-                </a:solidFill>
-              </a:defRPr>
-            </a:pPr>
-            <a:r>
-              <a:t>  • P → ∞ : coupled phase → isolated phase</a:t>
-            </a:r>
-            <a:br/>
-            <a:r>
-              <a:t>P → ∞ : 커플링 위상 → 고립 위상 수렴</a:t>
-            </a:r>
-          </a:p>
-          <a:p>
-            <a:pPr algn="l">
-              <a:spcBef>
-                <a:spcPts val="400"/>
-              </a:spcBef>
-              <a:spcAft>
-                <a:spcPts val="200"/>
-              </a:spcAft>
-              <a:defRPr sz="1300" b="0">
-                <a:solidFill>
-                  <a:srgbClr val="222222"/>
-                </a:solidFill>
-              </a:defRPr>
-            </a:pPr>
-            <a:r>
-              <a:t>  • Δφ → 0  as  P → ∞</a:t>
-            </a:r>
-          </a:p>
-        </p:txBody>
-      </p:sp>
-      <p:sp>
-        <p:nvSpPr>
-          <p:cNvPr id="6" name="Rectangle 5"/>
-          <p:cNvSpPr/>
+          <a:noFill/>
+        </p:spPr>
+        <p:txBody>
+          <a:bodyPr wrap="square">
+            <a:spAutoFit/>
+          </a:bodyPr>
+          <a:lstStyle/>
+          <a:p>
+            <a:pPr algn="l">
+              <a:defRPr sz="1500" b="1">
+                <a:solidFill>
+                  <a:srgbClr val="1A478A"/>
+                </a:solidFill>
+              </a:defRPr>
+            </a:pPr>
+            <a:r>
+              <a:t>Period</a:t>
+            </a:r>
+          </a:p>
+        </p:txBody>
+      </p:sp>
+      <p:sp>
+        <p:nvSpPr>
+          <p:cNvPr id="6" name="TextBox 5"/>
+          <p:cNvSpPr txBox="1"/>
           <p:nvPr/>
         </p:nvSpPr>
         <p:spPr>
           <a:xfrm>
-            <a:off x="6217920" y="1463040"/>
-            <a:ext cx="5303520" cy="1554480"/>
+            <a:off x="3200400" y="2011680"/>
+            <a:ext cx="1828800" cy="320040"/>
           </a:xfrm>
           <a:prstGeom prst="rect">
             <a:avLst/>
           </a:prstGeom>
-          <a:solidFill>
-            <a:srgbClr val="F0F4FA"/>
-          </a:solidFill>
-          <a:ln w="12700">
-            <a:solidFill>
-              <a:srgbClr val="304060"/>
-            </a:solidFill>
-          </a:ln>
-        </p:spPr>
-        <p:style>
-          <a:lnRef idx="1">
-            <a:schemeClr val="accent1"/>
-          </a:lnRef>
-          <a:fillRef idx="3">
-            <a:schemeClr val="accent1"/>
-          </a:fillRef>
-          <a:effectRef idx="2">
-            <a:schemeClr val="accent1"/>
-          </a:effectRef>
-          <a:fontRef idx="minor">
-            <a:schemeClr val="lt1"/>
-          </a:fontRef>
-        </p:style>
-        <p:txBody>
-          <a:bodyPr rtlCol="0" anchor="ctr" wrap="square"/>
-          <a:lstStyle/>
-          <a:p>
-            <a:pPr algn="l">
-              <a:defRPr sz="1600" b="1">
-                <a:solidFill>
-                  <a:srgbClr val="C0392B"/>
-                </a:solidFill>
-              </a:defRPr>
-            </a:pPr>
-            <a:r>
-              <a:t>3. Optical Theorem | 에너지 보존</a:t>
-            </a:r>
-          </a:p>
-          <a:p>
-            <a:pPr algn="l">
-              <a:spcBef>
-                <a:spcPts val="0"/>
-              </a:spcBef>
-              <a:spcAft>
-                <a:spcPts val="200"/>
-              </a:spcAft>
-              <a:defRPr sz="1200" b="0">
-                <a:solidFill>
-                  <a:srgbClr val="666677"/>
-                </a:solidFill>
-              </a:defRPr>
-            </a:pPr>
-            <a:r>
-              <a:t>[Conservation Check]</a:t>
-            </a:r>
-          </a:p>
-          <a:p>
-            <a:pPr algn="l">
-              <a:spcBef>
-                <a:spcPts val="400"/>
-              </a:spcBef>
-              <a:spcAft>
-                <a:spcPts val="200"/>
-              </a:spcAft>
-              <a:defRPr sz="1300" b="0">
-                <a:solidFill>
-                  <a:srgbClr val="222222"/>
-                </a:solidFill>
-              </a:defRPr>
-            </a:pPr>
-            <a:r>
-              <a:t>  • Verify extinction cross-section satisfies optical theorem</a:t>
-            </a:r>
-            <a:br/>
-            <a:r>
-              <a:t>소광 단면적이 optical theorem 만족하는지 검증</a:t>
-            </a:r>
-          </a:p>
-        </p:txBody>
-      </p:sp>
-      <p:sp>
-        <p:nvSpPr>
-          <p:cNvPr id="7" name="Rectangle 6"/>
-          <p:cNvSpPr/>
+          <a:noFill/>
+        </p:spPr>
+        <p:txBody>
+          <a:bodyPr wrap="square">
+            <a:spAutoFit/>
+          </a:bodyPr>
+          <a:lstStyle/>
+          <a:p>
+            <a:pPr algn="l">
+              <a:defRPr sz="1500" b="1">
+                <a:solidFill>
+                  <a:srgbClr val="1A478A"/>
+                </a:solidFill>
+              </a:defRPr>
+            </a:pPr>
+            <a:r>
+              <a:t>P/λ</a:t>
+            </a:r>
+          </a:p>
+        </p:txBody>
+      </p:sp>
+      <p:sp>
+        <p:nvSpPr>
+          <p:cNvPr id="7" name="TextBox 6"/>
+          <p:cNvSpPr txBox="1"/>
           <p:nvPr/>
         </p:nvSpPr>
         <p:spPr>
           <a:xfrm>
-            <a:off x="6217920" y="3291840"/>
-            <a:ext cx="5303520" cy="1554480"/>
+            <a:off x="5029200" y="2011680"/>
+            <a:ext cx="2286000" cy="320040"/>
           </a:xfrm>
           <a:prstGeom prst="rect">
             <a:avLst/>
           </a:prstGeom>
-          <a:solidFill>
-            <a:srgbClr val="F0F4FA"/>
-          </a:solidFill>
-          <a:ln w="12700">
-            <a:solidFill>
-              <a:srgbClr val="304060"/>
-            </a:solidFill>
-          </a:ln>
-        </p:spPr>
-        <p:style>
-          <a:lnRef idx="1">
-            <a:schemeClr val="accent1"/>
-          </a:lnRef>
-          <a:fillRef idx="3">
-            <a:schemeClr val="accent1"/>
-          </a:fillRef>
-          <a:effectRef idx="2">
-            <a:schemeClr val="accent1"/>
-          </a:effectRef>
-          <a:fontRef idx="minor">
-            <a:schemeClr val="lt1"/>
-          </a:fontRef>
-        </p:style>
-        <p:txBody>
-          <a:bodyPr rtlCol="0" anchor="ctr" wrap="square"/>
-          <a:lstStyle/>
-          <a:p>
-            <a:pPr algn="l">
-              <a:defRPr sz="1600" b="1">
+          <a:noFill/>
+        </p:spPr>
+        <p:txBody>
+          <a:bodyPr wrap="square">
+            <a:spAutoFit/>
+          </a:bodyPr>
+          <a:lstStyle/>
+          <a:p>
+            <a:pPr algn="l">
+              <a:defRPr sz="1500" b="1">
+                <a:solidFill>
+                  <a:srgbClr val="1A478A"/>
+                </a:solidFill>
+              </a:defRPr>
+            </a:pPr>
+            <a:r>
+              <a:t>Coupling</a:t>
+            </a:r>
+          </a:p>
+        </p:txBody>
+      </p:sp>
+      <p:sp>
+        <p:nvSpPr>
+          <p:cNvPr id="8" name="TextBox 7"/>
+          <p:cNvSpPr txBox="1"/>
+          <p:nvPr/>
+        </p:nvSpPr>
+        <p:spPr>
+          <a:xfrm>
+            <a:off x="7315200" y="2011680"/>
+            <a:ext cx="3657600" cy="320040"/>
+          </a:xfrm>
+          <a:prstGeom prst="rect">
+            <a:avLst/>
+          </a:prstGeom>
+          <a:noFill/>
+        </p:spPr>
+        <p:txBody>
+          <a:bodyPr wrap="square">
+            <a:spAutoFit/>
+          </a:bodyPr>
+          <a:lstStyle/>
+          <a:p>
+            <a:pPr algn="l">
+              <a:defRPr sz="1500" b="1">
+                <a:solidFill>
+                  <a:srgbClr val="1A478A"/>
+                </a:solidFill>
+              </a:defRPr>
+            </a:pPr>
+            <a:r>
+              <a:t>Expected Distortion</a:t>
+            </a:r>
+          </a:p>
+        </p:txBody>
+      </p:sp>
+      <p:sp>
+        <p:nvSpPr>
+          <p:cNvPr id="9" name="TextBox 8"/>
+          <p:cNvSpPr txBox="1"/>
+          <p:nvPr/>
+        </p:nvSpPr>
+        <p:spPr>
+          <a:xfrm>
+            <a:off x="731520" y="2377440"/>
+            <a:ext cx="2468880" cy="320040"/>
+          </a:xfrm>
+          <a:prstGeom prst="rect">
+            <a:avLst/>
+          </a:prstGeom>
+          <a:noFill/>
+        </p:spPr>
+        <p:txBody>
+          <a:bodyPr wrap="square">
+            <a:spAutoFit/>
+          </a:bodyPr>
+          <a:lstStyle/>
+          <a:p>
+            <a:pPr algn="l">
+              <a:defRPr sz="1400" b="0">
+                <a:solidFill>
+                  <a:srgbClr val="222222"/>
+                </a:solidFill>
+              </a:defRPr>
+            </a:pPr>
+            <a:r>
+              <a:t>Dense | 밀집</a:t>
+            </a:r>
+          </a:p>
+        </p:txBody>
+      </p:sp>
+      <p:sp>
+        <p:nvSpPr>
+          <p:cNvPr id="10" name="TextBox 9"/>
+          <p:cNvSpPr txBox="1"/>
+          <p:nvPr/>
+        </p:nvSpPr>
+        <p:spPr>
+          <a:xfrm>
+            <a:off x="3200400" y="2377440"/>
+            <a:ext cx="1828800" cy="320040"/>
+          </a:xfrm>
+          <a:prstGeom prst="rect">
+            <a:avLst/>
+          </a:prstGeom>
+          <a:noFill/>
+        </p:spPr>
+        <p:txBody>
+          <a:bodyPr wrap="square">
+            <a:spAutoFit/>
+          </a:bodyPr>
+          <a:lstStyle/>
+          <a:p>
+            <a:pPr algn="l">
+              <a:defRPr sz="1400" b="0">
+                <a:solidFill>
+                  <a:srgbClr val="222222"/>
+                </a:solidFill>
+              </a:defRPr>
+            </a:pPr>
+            <a:r>
+              <a:t>0.5</a:t>
+            </a:r>
+          </a:p>
+        </p:txBody>
+      </p:sp>
+      <p:sp>
+        <p:nvSpPr>
+          <p:cNvPr id="11" name="TextBox 10"/>
+          <p:cNvSpPr txBox="1"/>
+          <p:nvPr/>
+        </p:nvSpPr>
+        <p:spPr>
+          <a:xfrm>
+            <a:off x="5029200" y="2377440"/>
+            <a:ext cx="2286000" cy="320040"/>
+          </a:xfrm>
+          <a:prstGeom prst="rect">
+            <a:avLst/>
+          </a:prstGeom>
+          <a:noFill/>
+        </p:spPr>
+        <p:txBody>
+          <a:bodyPr wrap="square">
+            <a:spAutoFit/>
+          </a:bodyPr>
+          <a:lstStyle/>
+          <a:p>
+            <a:pPr algn="l">
+              <a:defRPr sz="1400" b="0">
+                <a:solidFill>
+                  <a:srgbClr val="222222"/>
+                </a:solidFill>
+              </a:defRPr>
+            </a:pPr>
+            <a:r>
+              <a:t>Strong | 강함</a:t>
+            </a:r>
+          </a:p>
+        </p:txBody>
+      </p:sp>
+      <p:sp>
+        <p:nvSpPr>
+          <p:cNvPr id="12" name="TextBox 11"/>
+          <p:cNvSpPr txBox="1"/>
+          <p:nvPr/>
+        </p:nvSpPr>
+        <p:spPr>
+          <a:xfrm>
+            <a:off x="7315200" y="2377440"/>
+            <a:ext cx="3657600" cy="320040"/>
+          </a:xfrm>
+          <a:prstGeom prst="rect">
+            <a:avLst/>
+          </a:prstGeom>
+          <a:noFill/>
+        </p:spPr>
+        <p:txBody>
+          <a:bodyPr wrap="square">
+            <a:spAutoFit/>
+          </a:bodyPr>
+          <a:lstStyle/>
+          <a:p>
+            <a:pPr algn="l">
+              <a:defRPr sz="1400" b="0">
+                <a:solidFill>
+                  <a:srgbClr val="222222"/>
+                </a:solidFill>
+              </a:defRPr>
+            </a:pPr>
+            <a:r>
+              <a:t>Large distortion | 큰 왜곡</a:t>
+            </a:r>
+          </a:p>
+        </p:txBody>
+      </p:sp>
+      <p:sp>
+        <p:nvSpPr>
+          <p:cNvPr id="13" name="TextBox 12"/>
+          <p:cNvSpPr txBox="1"/>
+          <p:nvPr/>
+        </p:nvSpPr>
+        <p:spPr>
+          <a:xfrm>
+            <a:off x="731520" y="2743200"/>
+            <a:ext cx="2468880" cy="320040"/>
+          </a:xfrm>
+          <a:prstGeom prst="rect">
+            <a:avLst/>
+          </a:prstGeom>
+          <a:noFill/>
+        </p:spPr>
+        <p:txBody>
+          <a:bodyPr wrap="square">
+            <a:spAutoFit/>
+          </a:bodyPr>
+          <a:lstStyle/>
+          <a:p>
+            <a:pPr algn="l">
+              <a:defRPr sz="1400" b="0">
+                <a:solidFill>
+                  <a:srgbClr val="222222"/>
+                </a:solidFill>
+              </a:defRPr>
+            </a:pPr>
+            <a:r>
+              <a:t>Medium | 중간</a:t>
+            </a:r>
+          </a:p>
+        </p:txBody>
+      </p:sp>
+      <p:sp>
+        <p:nvSpPr>
+          <p:cNvPr id="14" name="TextBox 13"/>
+          <p:cNvSpPr txBox="1"/>
+          <p:nvPr/>
+        </p:nvSpPr>
+        <p:spPr>
+          <a:xfrm>
+            <a:off x="3200400" y="2743200"/>
+            <a:ext cx="1828800" cy="320040"/>
+          </a:xfrm>
+          <a:prstGeom prst="rect">
+            <a:avLst/>
+          </a:prstGeom>
+          <a:noFill/>
+        </p:spPr>
+        <p:txBody>
+          <a:bodyPr wrap="square">
+            <a:spAutoFit/>
+          </a:bodyPr>
+          <a:lstStyle/>
+          <a:p>
+            <a:pPr algn="l">
+              <a:defRPr sz="1400" b="0">
+                <a:solidFill>
+                  <a:srgbClr val="222222"/>
+                </a:solidFill>
+              </a:defRPr>
+            </a:pPr>
+            <a:r>
+              <a:t>1.0</a:t>
+            </a:r>
+          </a:p>
+        </p:txBody>
+      </p:sp>
+      <p:sp>
+        <p:nvSpPr>
+          <p:cNvPr id="15" name="TextBox 14"/>
+          <p:cNvSpPr txBox="1"/>
+          <p:nvPr/>
+        </p:nvSpPr>
+        <p:spPr>
+          <a:xfrm>
+            <a:off x="5029200" y="2743200"/>
+            <a:ext cx="2286000" cy="320040"/>
+          </a:xfrm>
+          <a:prstGeom prst="rect">
+            <a:avLst/>
+          </a:prstGeom>
+          <a:noFill/>
+        </p:spPr>
+        <p:txBody>
+          <a:bodyPr wrap="square">
+            <a:spAutoFit/>
+          </a:bodyPr>
+          <a:lstStyle/>
+          <a:p>
+            <a:pPr algn="l">
+              <a:defRPr sz="1400" b="0">
+                <a:solidFill>
+                  <a:srgbClr val="222222"/>
+                </a:solidFill>
+              </a:defRPr>
+            </a:pPr>
+            <a:r>
+              <a:t>Moderate | 중간</a:t>
+            </a:r>
+          </a:p>
+        </p:txBody>
+      </p:sp>
+      <p:sp>
+        <p:nvSpPr>
+          <p:cNvPr id="16" name="TextBox 15"/>
+          <p:cNvSpPr txBox="1"/>
+          <p:nvPr/>
+        </p:nvSpPr>
+        <p:spPr>
+          <a:xfrm>
+            <a:off x="7315200" y="2743200"/>
+            <a:ext cx="3657600" cy="320040"/>
+          </a:xfrm>
+          <a:prstGeom prst="rect">
+            <a:avLst/>
+          </a:prstGeom>
+          <a:noFill/>
+        </p:spPr>
+        <p:txBody>
+          <a:bodyPr wrap="square">
+            <a:spAutoFit/>
+          </a:bodyPr>
+          <a:lstStyle/>
+          <a:p>
+            <a:pPr algn="l">
+              <a:defRPr sz="1400" b="0">
+                <a:solidFill>
+                  <a:srgbClr val="222222"/>
+                </a:solidFill>
+              </a:defRPr>
+            </a:pPr>
+            <a:r>
+              <a:t>Measurable | 측정 가능</a:t>
+            </a:r>
+          </a:p>
+        </p:txBody>
+      </p:sp>
+      <p:sp>
+        <p:nvSpPr>
+          <p:cNvPr id="17" name="TextBox 16"/>
+          <p:cNvSpPr txBox="1"/>
+          <p:nvPr/>
+        </p:nvSpPr>
+        <p:spPr>
+          <a:xfrm>
+            <a:off x="731520" y="3108960"/>
+            <a:ext cx="2468880" cy="320040"/>
+          </a:xfrm>
+          <a:prstGeom prst="rect">
+            <a:avLst/>
+          </a:prstGeom>
+          <a:noFill/>
+        </p:spPr>
+        <p:txBody>
+          <a:bodyPr wrap="square">
+            <a:spAutoFit/>
+          </a:bodyPr>
+          <a:lstStyle/>
+          <a:p>
+            <a:pPr algn="l">
+              <a:defRPr sz="1400" b="0">
+                <a:solidFill>
+                  <a:srgbClr val="222222"/>
+                </a:solidFill>
+              </a:defRPr>
+            </a:pPr>
+            <a:r>
+              <a:t>Sparse | 희박</a:t>
+            </a:r>
+          </a:p>
+        </p:txBody>
+      </p:sp>
+      <p:sp>
+        <p:nvSpPr>
+          <p:cNvPr id="18" name="TextBox 17"/>
+          <p:cNvSpPr txBox="1"/>
+          <p:nvPr/>
+        </p:nvSpPr>
+        <p:spPr>
+          <a:xfrm>
+            <a:off x="3200400" y="3108960"/>
+            <a:ext cx="1828800" cy="320040"/>
+          </a:xfrm>
+          <a:prstGeom prst="rect">
+            <a:avLst/>
+          </a:prstGeom>
+          <a:noFill/>
+        </p:spPr>
+        <p:txBody>
+          <a:bodyPr wrap="square">
+            <a:spAutoFit/>
+          </a:bodyPr>
+          <a:lstStyle/>
+          <a:p>
+            <a:pPr algn="l">
+              <a:defRPr sz="1400" b="0">
+                <a:solidFill>
+                  <a:srgbClr val="222222"/>
+                </a:solidFill>
+              </a:defRPr>
+            </a:pPr>
+            <a:r>
+              <a:t>1.5</a:t>
+            </a:r>
+          </a:p>
+        </p:txBody>
+      </p:sp>
+      <p:sp>
+        <p:nvSpPr>
+          <p:cNvPr id="19" name="TextBox 18"/>
+          <p:cNvSpPr txBox="1"/>
+          <p:nvPr/>
+        </p:nvSpPr>
+        <p:spPr>
+          <a:xfrm>
+            <a:off x="5029200" y="3108960"/>
+            <a:ext cx="2286000" cy="320040"/>
+          </a:xfrm>
+          <a:prstGeom prst="rect">
+            <a:avLst/>
+          </a:prstGeom>
+          <a:noFill/>
+        </p:spPr>
+        <p:txBody>
+          <a:bodyPr wrap="square">
+            <a:spAutoFit/>
+          </a:bodyPr>
+          <a:lstStyle/>
+          <a:p>
+            <a:pPr algn="l">
+              <a:defRPr sz="1400" b="0">
+                <a:solidFill>
+                  <a:srgbClr val="222222"/>
+                </a:solidFill>
+              </a:defRPr>
+            </a:pPr>
+            <a:r>
+              <a:t>Weak | 약함</a:t>
+            </a:r>
+          </a:p>
+        </p:txBody>
+      </p:sp>
+      <p:sp>
+        <p:nvSpPr>
+          <p:cNvPr id="20" name="TextBox 19"/>
+          <p:cNvSpPr txBox="1"/>
+          <p:nvPr/>
+        </p:nvSpPr>
+        <p:spPr>
+          <a:xfrm>
+            <a:off x="7315200" y="3108960"/>
+            <a:ext cx="3657600" cy="320040"/>
+          </a:xfrm>
+          <a:prstGeom prst="rect">
+            <a:avLst/>
+          </a:prstGeom>
+          <a:noFill/>
+        </p:spPr>
+        <p:txBody>
+          <a:bodyPr wrap="square">
+            <a:spAutoFit/>
+          </a:bodyPr>
+          <a:lstStyle/>
+          <a:p>
+            <a:pPr algn="l">
+              <a:defRPr sz="1400" b="0">
+                <a:solidFill>
+                  <a:srgbClr val="222222"/>
+                </a:solidFill>
+              </a:defRPr>
+            </a:pPr>
+            <a:r>
+              <a:t>Small | 작음</a:t>
+            </a:r>
+          </a:p>
+        </p:txBody>
+      </p:sp>
+      <p:sp>
+        <p:nvSpPr>
+          <p:cNvPr id="21" name="TextBox 20"/>
+          <p:cNvSpPr txBox="1"/>
+          <p:nvPr/>
+        </p:nvSpPr>
+        <p:spPr>
+          <a:xfrm>
+            <a:off x="731520" y="3474720"/>
+            <a:ext cx="2468880" cy="320040"/>
+          </a:xfrm>
+          <a:prstGeom prst="rect">
+            <a:avLst/>
+          </a:prstGeom>
+          <a:noFill/>
+        </p:spPr>
+        <p:txBody>
+          <a:bodyPr wrap="square">
+            <a:spAutoFit/>
+          </a:bodyPr>
+          <a:lstStyle/>
+          <a:p>
+            <a:pPr algn="l">
+              <a:defRPr sz="1400" b="0">
+                <a:solidFill>
+                  <a:srgbClr val="222222"/>
+                </a:solidFill>
+              </a:defRPr>
+            </a:pPr>
+            <a:r>
+              <a:t>Very sparse | 매우 희박</a:t>
+            </a:r>
+          </a:p>
+        </p:txBody>
+      </p:sp>
+      <p:sp>
+        <p:nvSpPr>
+          <p:cNvPr id="22" name="TextBox 21"/>
+          <p:cNvSpPr txBox="1"/>
+          <p:nvPr/>
+        </p:nvSpPr>
+        <p:spPr>
+          <a:xfrm>
+            <a:off x="3200400" y="3474720"/>
+            <a:ext cx="1828800" cy="320040"/>
+          </a:xfrm>
+          <a:prstGeom prst="rect">
+            <a:avLst/>
+          </a:prstGeom>
+          <a:noFill/>
+        </p:spPr>
+        <p:txBody>
+          <a:bodyPr wrap="square">
+            <a:spAutoFit/>
+          </a:bodyPr>
+          <a:lstStyle/>
+          <a:p>
+            <a:pPr algn="l">
+              <a:defRPr sz="1400" b="0">
+                <a:solidFill>
+                  <a:srgbClr val="222222"/>
+                </a:solidFill>
+              </a:defRPr>
+            </a:pPr>
+            <a:r>
+              <a:t>2.0</a:t>
+            </a:r>
+          </a:p>
+        </p:txBody>
+      </p:sp>
+      <p:sp>
+        <p:nvSpPr>
+          <p:cNvPr id="23" name="TextBox 22"/>
+          <p:cNvSpPr txBox="1"/>
+          <p:nvPr/>
+        </p:nvSpPr>
+        <p:spPr>
+          <a:xfrm>
+            <a:off x="5029200" y="3474720"/>
+            <a:ext cx="2286000" cy="320040"/>
+          </a:xfrm>
+          <a:prstGeom prst="rect">
+            <a:avLst/>
+          </a:prstGeom>
+          <a:noFill/>
+        </p:spPr>
+        <p:txBody>
+          <a:bodyPr wrap="square">
+            <a:spAutoFit/>
+          </a:bodyPr>
+          <a:lstStyle/>
+          <a:p>
+            <a:pPr algn="l">
+              <a:defRPr sz="1400" b="0">
+                <a:solidFill>
+                  <a:srgbClr val="222222"/>
+                </a:solidFill>
+              </a:defRPr>
+            </a:pPr>
+            <a:r>
+              <a:t>Negligible | 무시 가능</a:t>
+            </a:r>
+          </a:p>
+        </p:txBody>
+      </p:sp>
+      <p:sp>
+        <p:nvSpPr>
+          <p:cNvPr id="24" name="TextBox 23"/>
+          <p:cNvSpPr txBox="1"/>
+          <p:nvPr/>
+        </p:nvSpPr>
+        <p:spPr>
+          <a:xfrm>
+            <a:off x="7315200" y="3474720"/>
+            <a:ext cx="3657600" cy="320040"/>
+          </a:xfrm>
+          <a:prstGeom prst="rect">
+            <a:avLst/>
+          </a:prstGeom>
+          <a:noFill/>
+        </p:spPr>
+        <p:txBody>
+          <a:bodyPr wrap="square">
+            <a:spAutoFit/>
+          </a:bodyPr>
+          <a:lstStyle/>
+          <a:p>
+            <a:pPr algn="l">
+              <a:defRPr sz="1400" b="0">
+                <a:solidFill>
+                  <a:srgbClr val="222222"/>
+                </a:solidFill>
+              </a:defRPr>
+            </a:pPr>
+            <a:r>
+              <a:t>Baseline | 기준선</a:t>
+            </a:r>
+          </a:p>
+        </p:txBody>
+      </p:sp>
+      <p:sp>
+        <p:nvSpPr>
+          <p:cNvPr id="25" name="TextBox 24"/>
+          <p:cNvSpPr txBox="1"/>
+          <p:nvPr/>
+        </p:nvSpPr>
+        <p:spPr>
+          <a:xfrm>
+            <a:off x="731520" y="4114800"/>
+            <a:ext cx="10515600" cy="457200"/>
+          </a:xfrm>
+          <a:prstGeom prst="rect">
+            <a:avLst/>
+          </a:prstGeom>
+          <a:noFill/>
+        </p:spPr>
+        <p:txBody>
+          <a:bodyPr wrap="square">
+            <a:spAutoFit/>
+          </a:bodyPr>
+          <a:lstStyle/>
+          <a:p>
+            <a:pPr algn="l">
+              <a:defRPr sz="2000" b="1">
                 <a:solidFill>
                   <a:srgbClr val="C0392B"/>
                 </a:solidFill>
               </a:defRPr>
             </a:pPr>
             <a:r>
-              <a:t>4. Convergence | 수렴성 검사</a:t>
+              <a:t>Additional: Uniform vs Non-uniform Array | 추가: 균일 vs 비균일 배열</a:t>
+            </a:r>
+          </a:p>
+        </p:txBody>
+      </p:sp>
+      <p:sp>
+        <p:nvSpPr>
+          <p:cNvPr id="26" name="TextBox 25"/>
+          <p:cNvSpPr txBox="1"/>
+          <p:nvPr/>
+        </p:nvSpPr>
+        <p:spPr>
+          <a:xfrm>
+            <a:off x="731520" y="4754880"/>
+            <a:ext cx="5029200" cy="1645920"/>
+          </a:xfrm>
+          <a:prstGeom prst="rect">
+            <a:avLst/>
+          </a:prstGeom>
+          <a:noFill/>
+        </p:spPr>
+        <p:txBody>
+          <a:bodyPr wrap="square">
+            <a:spAutoFit/>
+          </a:bodyPr>
+          <a:lstStyle/>
+          <a:p>
+            <a:pPr algn="l">
+              <a:defRPr sz="1800" b="1">
+                <a:solidFill>
+                  <a:srgbClr val="2E6BB0"/>
+                </a:solidFill>
+              </a:defRPr>
+            </a:pPr>
+            <a:r>
+              <a:t>▸ Uniform array | 균일 배열</a:t>
+            </a:r>
+          </a:p>
+          <a:p>
+            <a:pPr algn="l">
+              <a:spcBef>
+                <a:spcPts val="400"/>
+              </a:spcBef>
+              <a:spcAft>
+                <a:spcPts val="200"/>
+              </a:spcAft>
+              <a:defRPr sz="1500" b="0">
+                <a:solidFill>
+                  <a:srgbClr val="222222"/>
+                </a:solidFill>
+              </a:defRPr>
+            </a:pPr>
+            <a:r>
+              <a:t>All atoms identical (same α)</a:t>
             </a:r>
           </a:p>
           <a:p>
@@ -8244,14 +8541,49 @@
               <a:spcAft>
                 <a:spcPts val="200"/>
               </a:spcAft>
-              <a:defRPr sz="1200" b="0">
+              <a:defRPr sz="1400" b="0">
                 <a:solidFill>
                   <a:srgbClr val="666677"/>
                 </a:solidFill>
               </a:defRPr>
             </a:pPr>
             <a:r>
-              <a:t>[Robustness Check]</a:t>
+              <a:t>모든 메타 원자 동일 → 순수 격자 커플링 분리</a:t>
+            </a:r>
+          </a:p>
+        </p:txBody>
+      </p:sp>
+      <p:sp>
+        <p:nvSpPr>
+          <p:cNvPr id="27" name="TextBox 26"/>
+          <p:cNvSpPr txBox="1"/>
+          <p:nvPr/>
+        </p:nvSpPr>
+        <p:spPr>
+          <a:xfrm>
+            <a:off x="6217920" y="4754880"/>
+            <a:ext cx="5029200" cy="1645920"/>
+          </a:xfrm>
+          <a:prstGeom prst="rect">
+            <a:avLst/>
+          </a:prstGeom>
+          <a:noFill/>
+        </p:spPr>
+        <p:txBody>
+          <a:bodyPr wrap="square">
+            <a:spAutoFit/>
+          </a:bodyPr>
+          <a:lstStyle/>
+          <a:p>
+            <a:pPr algn="l">
+              <a:defRPr sz="1800" b="1">
+                <a:solidFill>
+                  <a:srgbClr val="2E6BB0"/>
+                </a:solidFill>
+              </a:defRPr>
+            </a:pPr>
+            <a:r>
+              <a:t>▸ Non-uniform array | 비균일 배열</a:t>
             </a:r>
           </a:p>
           <a:p>
@@ -8262,18 +8594,32 @@
               <a:spcAft>
                 <a:spcPts val="200"/>
               </a:spcAft>
-              <a:defRPr sz="1300" b="0">
+              <a:defRPr sz="1500" b="0">
                 <a:solidFill>
                   <a:srgbClr val="222222"/>
                 </a:solidFill>
               </a:defRPr>
             </a:pPr>
             <a:r>
-              <a:t>  • Central atom's Δφ converges as N increases</a:t>
-            </a:r>
-            <a:br/>
-            <a:r>
-              <a:t>배열 크기 N ↑ 시 중심 원자 Δφ 수렴 확인</a:t>
+              <a:t>Each atom has different α (phase gradient)</a:t>
+            </a:r>
+          </a:p>
+          <a:p>
+            <a:pPr algn="l">
+              <a:spcBef>
+                <a:spcPts val="0"/>
+              </a:spcBef>
+              <a:spcAft>
+                <a:spcPts val="200"/>
+              </a:spcAft>
+              <a:defRPr sz="1400" b="0">
+                <a:solidFill>
+                  <a:srgbClr val="666677"/>
+                </a:solidFill>
+              </a:defRPr>
+            </a:pPr>
+            <a:r>
+              <a:t>각 원자 α 상이 → 실제 메타렌즈 상황과 유사</a:t>
             </a:r>
           </a:p>
         </p:txBody>
